--- a/a7/packages/A7 Unit 3 - Exponents and Scientific Notation/Slides/A7 3.09  Slides.pptx
+++ b/a7/packages/A7 Unit 3 - Exponents and Scientific Notation/Slides/A7 3.09  Slides.pptx
@@ -38,6 +38,7 @@
     <p:sldId id="286" r:id="rId37"/>
     <p:sldId id="287" r:id="rId38"/>
     <p:sldId id="288" r:id="rId39"/>
+    <p:sldId id="289" r:id="rId40"/>
   </p:sldIdLst>
   <p:sldSz cx="12191969" cy="6858000" type="screen4x3"/>
   <p:notesSz cx="6858000" cy="9144000"/>
@@ -8892,7 +8893,7 @@
                 </a:solidFill>
                 <a:latin typeface="Century Schoolbook"/>
               </a:rPr>
-              <a:t>Write  0.0000988  in scientific notation.</a:t>
+              <a:t>A machine's cutting tolerance is  0.0000988  inch.</a:t>
             </a:r>
           </a:p>
         </p:txBody>
@@ -8900,6 +8901,76 @@
       <p:sp>
         <p:nvSpPr>
           <p:cNvPr id="10" name="TextBox 9"/>
+          <p:cNvSpPr txBox="1"/>
+          <p:nvPr/>
+        </p:nvSpPr>
+        <p:spPr>
+          <a:xfrm>
+            <a:off x="777240" y="2769439"/>
+            <a:ext cx="10607040" cy="465151"/>
+          </a:xfrm>
+          <a:prstGeom prst="rect">
+            <a:avLst/>
+          </a:prstGeom>
+          <a:noFill/>
+        </p:spPr>
+        <p:txBody>
+          <a:bodyPr wrap="square" lIns="45720" rIns="45720" tIns="18288" bIns="18288" anchor="t">
+            <a:spAutoFit/>
+          </a:bodyPr>
+          <a:lstStyle/>
+          <a:p>
+            <a:pPr algn="ctr"/>
+            <a:r>
+              <a:rPr sz="2600" b="0" i="0">
+                <a:solidFill>
+                  <a:srgbClr val="1A1A1A"/>
+                </a:solidFill>
+                <a:latin typeface="Century Schoolbook"/>
+              </a:rPr>
+              <a:t>The part it cuts is 4 inches long.</a:t>
+            </a:r>
+          </a:p>
+        </p:txBody>
+      </p:sp>
+      <p:sp>
+        <p:nvSpPr>
+          <p:cNvPr id="11" name="TextBox 10"/>
+          <p:cNvSpPr txBox="1"/>
+          <p:nvPr/>
+        </p:nvSpPr>
+        <p:spPr>
+          <a:xfrm>
+            <a:off x="777240" y="3344318"/>
+            <a:ext cx="10607040" cy="465151"/>
+          </a:xfrm>
+          <a:prstGeom prst="rect">
+            <a:avLst/>
+          </a:prstGeom>
+          <a:noFill/>
+        </p:spPr>
+        <p:txBody>
+          <a:bodyPr wrap="square" lIns="45720" rIns="45720" tIns="18288" bIns="18288" anchor="t">
+            <a:spAutoFit/>
+          </a:bodyPr>
+          <a:lstStyle/>
+          <a:p>
+            <a:pPr algn="ctr"/>
+            <a:r>
+              <a:rPr sz="2600" b="0" i="0">
+                <a:solidFill>
+                  <a:srgbClr val="1A1A1A"/>
+                </a:solidFill>
+                <a:latin typeface="Century Schoolbook"/>
+              </a:rPr>
+              <a:t>Write the tolerance in scientific notation.</a:t>
+            </a:r>
+          </a:p>
+        </p:txBody>
+      </p:sp>
+      <p:sp>
+        <p:nvSpPr>
+          <p:cNvPr id="12" name="TextBox 11"/>
           <p:cNvSpPr txBox="1"/>
           <p:nvPr/>
         </p:nvSpPr>
@@ -8934,7 +9005,7 @@
       </p:sp>
       <p:sp>
         <p:nvSpPr>
-          <p:cNvPr id="11" name="TextBox 10"/>
+          <p:cNvPr id="13" name="TextBox 12"/>
           <p:cNvSpPr txBox="1"/>
           <p:nvPr/>
         </p:nvSpPr>
@@ -9260,7 +9331,7 @@
                 </a:solidFill>
                 <a:latin typeface="Century Schoolbook"/>
               </a:rPr>
-              <a:t>Write  0.0000988  in scientific notation.</a:t>
+              <a:t>A machine's cutting tolerance is  0.0000988  inch.</a:t>
             </a:r>
           </a:p>
         </p:txBody>
@@ -9273,7 +9344,77 @@
         </p:nvSpPr>
         <p:spPr>
           <a:xfrm>
-            <a:off x="1828800" y="2723719"/>
+            <a:off x="777240" y="2677999"/>
+            <a:ext cx="10607040" cy="465151"/>
+          </a:xfrm>
+          <a:prstGeom prst="rect">
+            <a:avLst/>
+          </a:prstGeom>
+          <a:noFill/>
+        </p:spPr>
+        <p:txBody>
+          <a:bodyPr wrap="square" lIns="45720" rIns="45720" tIns="18288" bIns="18288" anchor="t">
+            <a:spAutoFit/>
+          </a:bodyPr>
+          <a:lstStyle/>
+          <a:p>
+            <a:pPr algn="ctr"/>
+            <a:r>
+              <a:rPr sz="2600" b="0" i="0">
+                <a:solidFill>
+                  <a:srgbClr val="1A1A1A"/>
+                </a:solidFill>
+                <a:latin typeface="Century Schoolbook"/>
+              </a:rPr>
+              <a:t>The part it cuts is 4 inches long.</a:t>
+            </a:r>
+          </a:p>
+        </p:txBody>
+      </p:sp>
+      <p:sp>
+        <p:nvSpPr>
+          <p:cNvPr id="11" name="TextBox 10"/>
+          <p:cNvSpPr txBox="1"/>
+          <p:nvPr/>
+        </p:nvSpPr>
+        <p:spPr>
+          <a:xfrm>
+            <a:off x="777240" y="3252878"/>
+            <a:ext cx="10607040" cy="465151"/>
+          </a:xfrm>
+          <a:prstGeom prst="rect">
+            <a:avLst/>
+          </a:prstGeom>
+          <a:noFill/>
+        </p:spPr>
+        <p:txBody>
+          <a:bodyPr wrap="square" lIns="45720" rIns="45720" tIns="18288" bIns="18288" anchor="t">
+            <a:spAutoFit/>
+          </a:bodyPr>
+          <a:lstStyle/>
+          <a:p>
+            <a:pPr algn="ctr"/>
+            <a:r>
+              <a:rPr sz="2600" b="0" i="0">
+                <a:solidFill>
+                  <a:srgbClr val="1A1A1A"/>
+                </a:solidFill>
+                <a:latin typeface="Century Schoolbook"/>
+              </a:rPr>
+              <a:t>Write the tolerance in scientific notation.</a:t>
+            </a:r>
+          </a:p>
+        </p:txBody>
+      </p:sp>
+      <p:sp>
+        <p:nvSpPr>
+          <p:cNvPr id="12" name="TextBox 11"/>
+          <p:cNvSpPr txBox="1"/>
+          <p:nvPr/>
+        </p:nvSpPr>
+        <p:spPr>
+          <a:xfrm>
+            <a:off x="1828800" y="3873477"/>
             <a:ext cx="8503920" cy="548640"/>
           </a:xfrm>
           <a:prstGeom prst="rect">
@@ -9302,7 +9443,7 @@
       </p:sp>
       <p:sp>
         <p:nvSpPr>
-          <p:cNvPr id="11" name="TextBox 10"/>
+          <p:cNvPr id="13" name="TextBox 12"/>
           <p:cNvSpPr txBox="1"/>
           <p:nvPr/>
         </p:nvSpPr>
@@ -15355,7 +15496,7 @@
                 </a:solidFill>
                 <a:latin typeface="Century Schoolbook"/>
               </a:rPr>
-              <a:t>IXL</a:t>
+              <a:t>Independent Set</a:t>
             </a:r>
           </a:p>
         </p:txBody>
@@ -15460,7 +15601,7 @@
                 </a:solidFill>
                 <a:latin typeface="Century Schoolbook"/>
               </a:rPr>
-              <a:t>Last five minutes.</a:t>
+              <a:t>Six questions. On your own, in silence.</a:t>
             </a:r>
           </a:p>
         </p:txBody>
@@ -15578,6 +15719,479 @@
         </p:nvSpPr>
         <p:spPr>
           <a:xfrm>
+            <a:off x="960120" y="2011680"/>
+            <a:ext cx="548640" cy="356616"/>
+          </a:xfrm>
+          <a:prstGeom prst="rect">
+            <a:avLst/>
+          </a:prstGeom>
+          <a:noFill/>
+        </p:spPr>
+        <p:txBody>
+          <a:bodyPr wrap="square" lIns="45720" rIns="45720" tIns="18288" bIns="18288" anchor="t">
+            <a:spAutoFit/>
+          </a:bodyPr>
+          <a:lstStyle/>
+          <a:p>
+            <a:pPr algn="l"/>
+            <a:r>
+              <a:rPr sz="2100" b="1" i="0">
+                <a:solidFill>
+                  <a:srgbClr val="0B5394"/>
+                </a:solidFill>
+                <a:latin typeface="Century Schoolbook"/>
+              </a:rPr>
+              <a:t>1.</a:t>
+            </a:r>
+          </a:p>
+        </p:txBody>
+      </p:sp>
+      <p:sp>
+        <p:nvSpPr>
+          <p:cNvPr id="10" name="TextBox 9"/>
+          <p:cNvSpPr txBox="1"/>
+          <p:nvPr/>
+        </p:nvSpPr>
+        <p:spPr>
+          <a:xfrm>
+            <a:off x="1554480" y="2011680"/>
+            <a:ext cx="9829800" cy="411480"/>
+          </a:xfrm>
+          <a:prstGeom prst="rect">
+            <a:avLst/>
+          </a:prstGeom>
+          <a:noFill/>
+        </p:spPr>
+        <p:txBody>
+          <a:bodyPr wrap="square" lIns="45720" rIns="45720" tIns="18288" bIns="18288" anchor="t">
+            <a:spAutoFit/>
+          </a:bodyPr>
+          <a:lstStyle/>
+          <a:p>
+            <a:pPr algn="l"/>
+            <a:r>
+              <a:rPr sz="2100" b="0" i="0">
+                <a:solidFill>
+                  <a:srgbClr val="1A1A1A"/>
+                </a:solidFill>
+                <a:latin typeface="Century Schoolbook"/>
+              </a:rPr>
+              <a:t>Six questions. Work down the page.</a:t>
+            </a:r>
+          </a:p>
+        </p:txBody>
+      </p:sp>
+      <p:sp>
+        <p:nvSpPr>
+          <p:cNvPr id="11" name="TextBox 10"/>
+          <p:cNvSpPr txBox="1"/>
+          <p:nvPr/>
+        </p:nvSpPr>
+        <p:spPr>
+          <a:xfrm>
+            <a:off x="960120" y="2551176"/>
+            <a:ext cx="548640" cy="356616"/>
+          </a:xfrm>
+          <a:prstGeom prst="rect">
+            <a:avLst/>
+          </a:prstGeom>
+          <a:noFill/>
+        </p:spPr>
+        <p:txBody>
+          <a:bodyPr wrap="square" lIns="45720" rIns="45720" tIns="18288" bIns="18288" anchor="t">
+            <a:spAutoFit/>
+          </a:bodyPr>
+          <a:lstStyle/>
+          <a:p>
+            <a:pPr algn="l"/>
+            <a:r>
+              <a:rPr sz="2100" b="1" i="0">
+                <a:solidFill>
+                  <a:srgbClr val="0B5394"/>
+                </a:solidFill>
+                <a:latin typeface="Century Schoolbook"/>
+              </a:rPr>
+              <a:t>2.</a:t>
+            </a:r>
+          </a:p>
+        </p:txBody>
+      </p:sp>
+      <p:sp>
+        <p:nvSpPr>
+          <p:cNvPr id="12" name="TextBox 11"/>
+          <p:cNvSpPr txBox="1"/>
+          <p:nvPr/>
+        </p:nvSpPr>
+        <p:spPr>
+          <a:xfrm>
+            <a:off x="1554480" y="2551176"/>
+            <a:ext cx="9829800" cy="411480"/>
+          </a:xfrm>
+          <a:prstGeom prst="rect">
+            <a:avLst/>
+          </a:prstGeom>
+          <a:noFill/>
+        </p:spPr>
+        <p:txBody>
+          <a:bodyPr wrap="square" lIns="45720" rIns="45720" tIns="18288" bIns="18288" anchor="t">
+            <a:spAutoFit/>
+          </a:bodyPr>
+          <a:lstStyle/>
+          <a:p>
+            <a:pPr algn="l"/>
+            <a:r>
+              <a:rPr sz="2100" b="0" i="0">
+                <a:solidFill>
+                  <a:srgbClr val="1A1A1A"/>
+                </a:solidFill>
+                <a:latin typeface="Century Schoolbook"/>
+              </a:rPr>
+              <a:t>Show the step that does the work, not just the answer.</a:t>
+            </a:r>
+          </a:p>
+        </p:txBody>
+      </p:sp>
+      <p:sp>
+        <p:nvSpPr>
+          <p:cNvPr id="13" name="TextBox 12"/>
+          <p:cNvSpPr txBox="1"/>
+          <p:nvPr/>
+        </p:nvSpPr>
+        <p:spPr>
+          <a:xfrm>
+            <a:off x="960120" y="3090672"/>
+            <a:ext cx="548640" cy="356616"/>
+          </a:xfrm>
+          <a:prstGeom prst="rect">
+            <a:avLst/>
+          </a:prstGeom>
+          <a:noFill/>
+        </p:spPr>
+        <p:txBody>
+          <a:bodyPr wrap="square" lIns="45720" rIns="45720" tIns="18288" bIns="18288" anchor="t">
+            <a:spAutoFit/>
+          </a:bodyPr>
+          <a:lstStyle/>
+          <a:p>
+            <a:pPr algn="l"/>
+            <a:r>
+              <a:rPr sz="2100" b="1" i="0">
+                <a:solidFill>
+                  <a:srgbClr val="0B5394"/>
+                </a:solidFill>
+                <a:latin typeface="Century Schoolbook"/>
+              </a:rPr>
+              <a:t>3.</a:t>
+            </a:r>
+          </a:p>
+        </p:txBody>
+      </p:sp>
+      <p:sp>
+        <p:nvSpPr>
+          <p:cNvPr id="14" name="TextBox 13"/>
+          <p:cNvSpPr txBox="1"/>
+          <p:nvPr/>
+        </p:nvSpPr>
+        <p:spPr>
+          <a:xfrm>
+            <a:off x="1554480" y="3090672"/>
+            <a:ext cx="9829800" cy="411480"/>
+          </a:xfrm>
+          <a:prstGeom prst="rect">
+            <a:avLst/>
+          </a:prstGeom>
+          <a:noFill/>
+        </p:spPr>
+        <p:txBody>
+          <a:bodyPr wrap="square" lIns="45720" rIns="45720" tIns="18288" bIns="18288" anchor="t">
+            <a:spAutoFit/>
+          </a:bodyPr>
+          <a:lstStyle/>
+          <a:p>
+            <a:pPr algn="l"/>
+            <a:r>
+              <a:rPr sz="2100" b="0" i="0">
+                <a:solidFill>
+                  <a:srgbClr val="1A1A1A"/>
+                </a:solidFill>
+                <a:latin typeface="Century Schoolbook"/>
+              </a:rPr>
+              <a:t>Silence until the six minutes are up.</a:t>
+            </a:r>
+          </a:p>
+        </p:txBody>
+      </p:sp>
+    </p:spTree>
+  </p:cSld>
+  <p:clrMapOvr>
+    <a:masterClrMapping/>
+  </p:clrMapOvr>
+</p:sld>
+</file>
+
+<file path=ppt/slides/slide34.xml><?xml version="1.0" encoding="utf-8"?>
+<p:sld xmlns:a="http://schemas.openxmlformats.org/drawingml/2006/main" xmlns:p="http://schemas.openxmlformats.org/presentationml/2006/main" xmlns:r="http://schemas.openxmlformats.org/officeDocument/2006/relationships">
+  <p:cSld>
+    <p:spTree>
+      <p:nvGrpSpPr>
+        <p:cNvPr id="1" name=""/>
+        <p:cNvGrpSpPr/>
+        <p:nvPr/>
+      </p:nvGrpSpPr>
+      <p:grpSpPr/>
+      <p:sp>
+        <p:nvSpPr>
+          <p:cNvPr id="2" name="TextBox 1"/>
+          <p:cNvSpPr txBox="1"/>
+          <p:nvPr/>
+        </p:nvSpPr>
+        <p:spPr>
+          <a:xfrm>
+            <a:off x="777240" y="365760"/>
+            <a:ext cx="10607040" cy="640080"/>
+          </a:xfrm>
+          <a:prstGeom prst="rect">
+            <a:avLst/>
+          </a:prstGeom>
+          <a:noFill/>
+        </p:spPr>
+        <p:txBody>
+          <a:bodyPr wrap="square" lIns="45720" rIns="45720" tIns="18288" bIns="18288" anchor="t">
+            <a:spAutoFit/>
+          </a:bodyPr>
+          <a:lstStyle/>
+          <a:p>
+            <a:pPr algn="l"/>
+            <a:r>
+              <a:rPr sz="3600" b="1" i="0">
+                <a:solidFill>
+                  <a:srgbClr val="1A1A1A"/>
+                </a:solidFill>
+                <a:latin typeface="Century Schoolbook"/>
+              </a:rPr>
+              <a:t>IXL</a:t>
+            </a:r>
+          </a:p>
+        </p:txBody>
+      </p:sp>
+      <p:cxnSp>
+        <p:nvCxnSpPr>
+          <p:cNvPr id="3" name="Connector 2"/>
+          <p:cNvCxnSpPr/>
+          <p:nvPr/>
+        </p:nvCxnSpPr>
+        <p:spPr>
+          <a:xfrm>
+            <a:off x="777240" y="1097280"/>
+            <a:ext cx="10607040" cy="0"/>
+          </a:xfrm>
+          <a:prstGeom prst="line">
+            <a:avLst/>
+          </a:prstGeom>
+          <a:ln w="19050">
+            <a:solidFill>
+              <a:srgbClr val="1A1A1A"/>
+            </a:solidFill>
+          </a:ln>
+        </p:spPr>
+        <p:style>
+          <a:lnRef idx="2">
+            <a:schemeClr val="accent1"/>
+          </a:lnRef>
+          <a:fillRef idx="0">
+            <a:schemeClr val="accent1"/>
+          </a:fillRef>
+          <a:effectRef idx="1">
+            <a:schemeClr val="accent1"/>
+          </a:effectRef>
+          <a:fontRef idx="minor">
+            <a:schemeClr val="tx1"/>
+          </a:fontRef>
+        </p:style>
+      </p:cxnSp>
+      <p:cxnSp>
+        <p:nvCxnSpPr>
+          <p:cNvPr id="4" name="Connector 3"/>
+          <p:cNvCxnSpPr/>
+          <p:nvPr/>
+        </p:nvCxnSpPr>
+        <p:spPr>
+          <a:xfrm>
+            <a:off x="777240" y="1179576"/>
+            <a:ext cx="10607040" cy="0"/>
+          </a:xfrm>
+          <a:prstGeom prst="line">
+            <a:avLst/>
+          </a:prstGeom>
+          <a:ln w="9525">
+            <a:solidFill>
+              <a:srgbClr val="1A1A1A"/>
+            </a:solidFill>
+          </a:ln>
+        </p:spPr>
+        <p:style>
+          <a:lnRef idx="2">
+            <a:schemeClr val="accent1"/>
+          </a:lnRef>
+          <a:fillRef idx="0">
+            <a:schemeClr val="accent1"/>
+          </a:fillRef>
+          <a:effectRef idx="1">
+            <a:schemeClr val="accent1"/>
+          </a:effectRef>
+          <a:fontRef idx="minor">
+            <a:schemeClr val="tx1"/>
+          </a:fontRef>
+        </p:style>
+      </p:cxnSp>
+      <p:sp>
+        <p:nvSpPr>
+          <p:cNvPr id="5" name="TextBox 4"/>
+          <p:cNvSpPr txBox="1"/>
+          <p:nvPr/>
+        </p:nvSpPr>
+        <p:spPr>
+          <a:xfrm>
+            <a:off x="777240" y="1261872"/>
+            <a:ext cx="10607040" cy="310896"/>
+          </a:xfrm>
+          <a:prstGeom prst="rect">
+            <a:avLst/>
+          </a:prstGeom>
+          <a:noFill/>
+        </p:spPr>
+        <p:txBody>
+          <a:bodyPr wrap="square" lIns="45720" rIns="45720" tIns="18288" bIns="18288" anchor="t">
+            <a:spAutoFit/>
+          </a:bodyPr>
+          <a:lstStyle/>
+          <a:p>
+            <a:pPr algn="l"/>
+            <a:r>
+              <a:rPr sz="1700" b="0" i="1">
+                <a:solidFill>
+                  <a:srgbClr val="6B6B6B"/>
+                </a:solidFill>
+                <a:latin typeface="Century Schoolbook"/>
+              </a:rPr>
+              <a:t>Last five minutes.</a:t>
+            </a:r>
+          </a:p>
+        </p:txBody>
+      </p:sp>
+      <p:cxnSp>
+        <p:nvCxnSpPr>
+          <p:cNvPr id="6" name="Connector 5"/>
+          <p:cNvCxnSpPr/>
+          <p:nvPr/>
+        </p:nvCxnSpPr>
+        <p:spPr>
+          <a:xfrm>
+            <a:off x="777240" y="6199632"/>
+            <a:ext cx="10607040" cy="0"/>
+          </a:xfrm>
+          <a:prstGeom prst="line">
+            <a:avLst/>
+          </a:prstGeom>
+          <a:ln w="9525">
+            <a:solidFill>
+              <a:srgbClr val="6B6B6B"/>
+            </a:solidFill>
+          </a:ln>
+        </p:spPr>
+        <p:style>
+          <a:lnRef idx="2">
+            <a:schemeClr val="accent1"/>
+          </a:lnRef>
+          <a:fillRef idx="0">
+            <a:schemeClr val="accent1"/>
+          </a:fillRef>
+          <a:effectRef idx="1">
+            <a:schemeClr val="accent1"/>
+          </a:effectRef>
+          <a:fontRef idx="minor">
+            <a:schemeClr val="tx1"/>
+          </a:fontRef>
+        </p:style>
+      </p:cxnSp>
+      <p:sp>
+        <p:nvSpPr>
+          <p:cNvPr id="7" name="TextBox 6"/>
+          <p:cNvSpPr txBox="1"/>
+          <p:nvPr/>
+        </p:nvSpPr>
+        <p:spPr>
+          <a:xfrm>
+            <a:off x="777240" y="6272784"/>
+            <a:ext cx="9692640" cy="274320"/>
+          </a:xfrm>
+          <a:prstGeom prst="rect">
+            <a:avLst/>
+          </a:prstGeom>
+          <a:noFill/>
+        </p:spPr>
+        <p:txBody>
+          <a:bodyPr wrap="square" lIns="45720" rIns="45720" tIns="18288" bIns="18288" anchor="t">
+            <a:spAutoFit/>
+          </a:bodyPr>
+          <a:lstStyle/>
+          <a:p>
+            <a:pPr algn="l"/>
+            <a:r>
+              <a:rPr sz="1100" b="0" i="1">
+                <a:solidFill>
+                  <a:srgbClr val="6B6B6B"/>
+                </a:solidFill>
+                <a:latin typeface="Century Schoolbook"/>
+              </a:rPr>
+              <a:t>Grade 7 Accelerated · Unit 3 · Lesson 9 — Writing Small Numbers in Scientific Notation</a:t>
+            </a:r>
+          </a:p>
+        </p:txBody>
+      </p:sp>
+      <p:sp>
+        <p:nvSpPr>
+          <p:cNvPr id="8" name="TextBox 7"/>
+          <p:cNvSpPr txBox="1"/>
+          <p:nvPr/>
+        </p:nvSpPr>
+        <p:spPr>
+          <a:xfrm>
+            <a:off x="10744200" y="6272784"/>
+            <a:ext cx="640080" cy="274320"/>
+          </a:xfrm>
+          <a:prstGeom prst="rect">
+            <a:avLst/>
+          </a:prstGeom>
+          <a:noFill/>
+        </p:spPr>
+        <p:txBody>
+          <a:bodyPr wrap="square" lIns="45720" rIns="45720" tIns="18288" bIns="18288" anchor="t">
+            <a:spAutoFit/>
+          </a:bodyPr>
+          <a:lstStyle/>
+          <a:p>
+            <a:pPr algn="r"/>
+            <a:r>
+              <a:rPr sz="1100" b="0" i="0">
+                <a:solidFill>
+                  <a:srgbClr val="6B6B6B"/>
+                </a:solidFill>
+                <a:latin typeface="Century Schoolbook"/>
+              </a:rPr>
+              <a:t>34</a:t>
+            </a:r>
+          </a:p>
+        </p:txBody>
+      </p:sp>
+      <p:sp>
+        <p:nvSpPr>
+          <p:cNvPr id="9" name="TextBox 8"/>
+          <p:cNvSpPr txBox="1"/>
+          <p:nvPr/>
+        </p:nvSpPr>
+        <p:spPr>
+          <a:xfrm>
             <a:off x="960120" y="1828800"/>
             <a:ext cx="548640" cy="356616"/>
           </a:xfrm>
@@ -15775,7 +16389,7 @@
                 </a:solidFill>
                 <a:latin typeface="Century Schoolbook"/>
               </a:rPr>
-              <a:t>Stop at a SmartScore of 67 on each skill. Whatever you do not finish is tonight's practice.</a:t>
+              <a:t>Every skill listed is required, to a SmartScore of 67. Due at the start of the next class.</a:t>
             </a:r>
           </a:p>
         </p:txBody>
@@ -15810,7 +16424,7 @@
                 </a:solidFill>
                 <a:latin typeface="Century Schoolbook"/>
               </a:rPr>
-              <a:t>Today's skills</a:t>
+              <a:t>Today's skills — all required</a:t>
             </a:r>
           </a:p>
         </p:txBody>

--- a/a7/packages/A7 Unit 3 - Exponents and Scientific Notation/Slides/A7 3.09  Slides.pptx
+++ b/a7/packages/A7 Unit 3 - Exponents and Scientific Notation/Slides/A7 3.09  Slides.pptx
@@ -16529,7 +16529,7 @@
                 </a:solidFill>
                 <a:latin typeface="Century Schoolbook"/>
               </a:rPr>
-              <a:t>Also consider: Powers of ten with negative exponents — SKD</a:t>
+              <a:t>Powers of ten with negative exponents — SKD</a:t>
             </a:r>
           </a:p>
         </p:txBody>

--- a/a7/packages/A7 Unit 3 - Exponents and Scientific Notation/Slides/A7 3.09  Slides.pptx
+++ b/a7/packages/A7 Unit 3 - Exponents and Scientific Notation/Slides/A7 3.09  Slides.pptx
@@ -4235,8 +4235,8 @@
         </p:nvSpPr>
         <p:spPr>
           <a:xfrm>
-            <a:off x="1281684" y="2080260"/>
-            <a:ext cx="4674616" cy="457200"/>
+            <a:off x="1499191" y="2080260"/>
+            <a:ext cx="4558064" cy="457200"/>
           </a:xfrm>
           <a:prstGeom prst="rect">
             <a:avLst/>
@@ -4245,7 +4245,7 @@
         </p:spPr>
         <p:txBody>
           <a:bodyPr wrap="none" lIns="45720" rIns="45720" tIns="18288" bIns="18288" anchor="ctr">
-            <a:spAutoFit/>
+            <a:noAutofit/>
           </a:bodyPr>
           <a:lstStyle/>
           <a:p>
@@ -4278,7 +4278,7 @@
         </p:blipFill>
         <p:spPr>
           <a:xfrm>
-            <a:off x="5819140" y="2133599"/>
+            <a:off x="5920096" y="2133599"/>
             <a:ext cx="1621536" cy="350520"/>
           </a:xfrm>
           <a:prstGeom prst="rect">
@@ -4294,8 +4294,8 @@
         </p:nvSpPr>
         <p:spPr>
           <a:xfrm>
-            <a:off x="7440676" y="2080260"/>
-            <a:ext cx="1583944" cy="457200"/>
+            <a:off x="7541632" y="2080260"/>
+            <a:ext cx="1356212" cy="457200"/>
           </a:xfrm>
           <a:prstGeom prst="rect">
             <a:avLst/>
@@ -4304,7 +4304,7 @@
         </p:spPr>
         <p:txBody>
           <a:bodyPr wrap="none" lIns="45720" rIns="45720" tIns="18288" bIns="18288" anchor="ctr">
-            <a:spAutoFit/>
+            <a:noAutofit/>
           </a:bodyPr>
           <a:lstStyle/>
           <a:p>
@@ -4337,7 +4337,7 @@
         </p:blipFill>
         <p:spPr>
           <a:xfrm>
-            <a:off x="8887460" y="2136648"/>
+            <a:off x="8760684" y="2136648"/>
             <a:ext cx="1575816" cy="344424"/>
           </a:xfrm>
           <a:prstGeom prst="rect">
@@ -4353,8 +4353,8 @@
         </p:nvSpPr>
         <p:spPr>
           <a:xfrm>
-            <a:off x="10463276" y="2080260"/>
-            <a:ext cx="553720" cy="457200"/>
+            <a:off x="10336500" y="2080260"/>
+            <a:ext cx="462987" cy="457200"/>
           </a:xfrm>
           <a:prstGeom prst="rect">
             <a:avLst/>
@@ -4363,7 +4363,7 @@
         </p:spPr>
         <p:txBody>
           <a:bodyPr wrap="none" lIns="45720" rIns="45720" tIns="18288" bIns="18288" anchor="ctr">
-            <a:spAutoFit/>
+            <a:noAutofit/>
           </a:bodyPr>
           <a:lstStyle/>
           <a:p>
@@ -4645,7 +4645,7 @@
       </p:sp>
       <p:pic>
         <p:nvPicPr>
-          <p:cNvPr id="9" name="Picture 8" descr="1e5666fbbaf7f209.png"/>
+          <p:cNvPr id="9" name="Picture 8" descr="42e61c73ee7164e8.png"/>
           <p:cNvPicPr>
             <a:picLocks noChangeAspect="1"/>
           </p:cNvPicPr>
@@ -4660,7 +4660,7 @@
         <p:spPr>
           <a:xfrm>
             <a:off x="1828800" y="1920240"/>
-            <a:ext cx="996696" cy="518160"/>
+            <a:ext cx="1149096" cy="682752"/>
           </a:xfrm>
           <a:prstGeom prst="rect">
             <a:avLst/>
@@ -4675,7 +4675,7 @@
         </p:nvSpPr>
         <p:spPr>
           <a:xfrm>
-            <a:off x="3282696" y="1950720"/>
+            <a:off x="3435096" y="2033016"/>
             <a:ext cx="6400800" cy="502920"/>
           </a:xfrm>
           <a:prstGeom prst="rect">
@@ -4704,7 +4704,7 @@
       </p:sp>
       <p:pic>
         <p:nvPicPr>
-          <p:cNvPr id="11" name="Picture 10" descr="72980b121f036978.png"/>
+          <p:cNvPr id="11" name="Picture 10" descr="e3fbb572cebb19ea.png"/>
           <p:cNvPicPr>
             <a:picLocks noChangeAspect="1"/>
           </p:cNvPicPr>
@@ -4718,8 +4718,8 @@
         </p:blipFill>
         <p:spPr>
           <a:xfrm>
-            <a:off x="1828800" y="2712720"/>
-            <a:ext cx="3486912" cy="603504"/>
+            <a:off x="1828800" y="2877312"/>
+            <a:ext cx="3718560" cy="810768"/>
           </a:xfrm>
           <a:prstGeom prst="rect">
             <a:avLst/>
@@ -4734,8 +4734,8 @@
         </p:nvSpPr>
         <p:spPr>
           <a:xfrm>
-            <a:off x="5772912" y="2785872"/>
-            <a:ext cx="5611367" cy="502920"/>
+            <a:off x="6004560" y="3054096"/>
+            <a:ext cx="5379720" cy="502920"/>
           </a:xfrm>
           <a:prstGeom prst="rect">
             <a:avLst/>
@@ -4777,7 +4777,7 @@
         </p:blipFill>
         <p:spPr>
           <a:xfrm>
-            <a:off x="1828800" y="3590544"/>
+            <a:off x="1828800" y="3962399"/>
             <a:ext cx="2450592" cy="396240"/>
           </a:xfrm>
           <a:prstGeom prst="rect">
@@ -4793,7 +4793,7 @@
         </p:nvSpPr>
         <p:spPr>
           <a:xfrm>
-            <a:off x="4736592" y="3560064"/>
+            <a:off x="4736592" y="3931920"/>
             <a:ext cx="6400800" cy="502920"/>
           </a:xfrm>
           <a:prstGeom prst="rect">
@@ -4828,7 +4828,7 @@
         </p:nvSpPr>
         <p:spPr>
           <a:xfrm>
-            <a:off x="777240" y="4572000"/>
+            <a:off x="777240" y="4815840"/>
             <a:ext cx="10607040" cy="548640"/>
           </a:xfrm>
           <a:prstGeom prst="rect">
@@ -5126,8 +5126,8 @@
         </p:nvSpPr>
         <p:spPr>
           <a:xfrm>
-            <a:off x="871727" y="2185415"/>
-            <a:ext cx="4674616" cy="457200"/>
+            <a:off x="1089235" y="2185415"/>
+            <a:ext cx="4558064" cy="457200"/>
           </a:xfrm>
           <a:prstGeom prst="rect">
             <a:avLst/>
@@ -5136,7 +5136,7 @@
         </p:spPr>
         <p:txBody>
           <a:bodyPr wrap="none" lIns="45720" rIns="45720" tIns="18288" bIns="18288" anchor="ctr">
-            <a:spAutoFit/>
+            <a:noAutofit/>
           </a:bodyPr>
           <a:lstStyle/>
           <a:p>
@@ -5169,7 +5169,7 @@
         </p:blipFill>
         <p:spPr>
           <a:xfrm>
-            <a:off x="5409183" y="2196083"/>
+            <a:off x="5510140" y="2196083"/>
             <a:ext cx="2005584" cy="435864"/>
           </a:xfrm>
           <a:prstGeom prst="rect">
@@ -5185,8 +5185,8 @@
         </p:nvSpPr>
         <p:spPr>
           <a:xfrm>
-            <a:off x="7414767" y="2185415"/>
-            <a:ext cx="1583944" cy="457200"/>
+            <a:off x="7515724" y="2185415"/>
+            <a:ext cx="1356212" cy="457200"/>
           </a:xfrm>
           <a:prstGeom prst="rect">
             <a:avLst/>
@@ -5195,7 +5195,7 @@
         </p:spPr>
         <p:txBody>
           <a:bodyPr wrap="none" lIns="45720" rIns="45720" tIns="18288" bIns="18288" anchor="ctr">
-            <a:spAutoFit/>
+            <a:noAutofit/>
           </a:bodyPr>
           <a:lstStyle/>
           <a:p>
@@ -5228,7 +5228,7 @@
         </p:blipFill>
         <p:spPr>
           <a:xfrm>
-            <a:off x="8861552" y="2194560"/>
+            <a:off x="8734776" y="2194560"/>
             <a:ext cx="2011680" cy="438912"/>
           </a:xfrm>
           <a:prstGeom prst="rect">
@@ -5244,8 +5244,8 @@
         </p:nvSpPr>
         <p:spPr>
           <a:xfrm>
-            <a:off x="10873232" y="2185415"/>
-            <a:ext cx="553720" cy="457200"/>
+            <a:off x="10746456" y="2185415"/>
+            <a:ext cx="462987" cy="457200"/>
           </a:xfrm>
           <a:prstGeom prst="rect">
             <a:avLst/>
@@ -5254,7 +5254,7 @@
         </p:spPr>
         <p:txBody>
           <a:bodyPr wrap="none" lIns="45720" rIns="45720" tIns="18288" bIns="18288" anchor="ctr">
-            <a:spAutoFit/>
+            <a:noAutofit/>
           </a:bodyPr>
           <a:lstStyle/>
           <a:p>
@@ -5542,8 +5542,8 @@
         </p:nvSpPr>
         <p:spPr>
           <a:xfrm>
-            <a:off x="871727" y="2185415"/>
-            <a:ext cx="4674616" cy="457200"/>
+            <a:off x="1089235" y="2185415"/>
+            <a:ext cx="4558064" cy="457200"/>
           </a:xfrm>
           <a:prstGeom prst="rect">
             <a:avLst/>
@@ -5552,7 +5552,7 @@
         </p:spPr>
         <p:txBody>
           <a:bodyPr wrap="none" lIns="45720" rIns="45720" tIns="18288" bIns="18288" anchor="ctr">
-            <a:spAutoFit/>
+            <a:noAutofit/>
           </a:bodyPr>
           <a:lstStyle/>
           <a:p>
@@ -5585,7 +5585,7 @@
         </p:blipFill>
         <p:spPr>
           <a:xfrm>
-            <a:off x="5409183" y="2196083"/>
+            <a:off x="5510140" y="2196083"/>
             <a:ext cx="2005584" cy="435864"/>
           </a:xfrm>
           <a:prstGeom prst="rect">
@@ -5601,8 +5601,8 @@
         </p:nvSpPr>
         <p:spPr>
           <a:xfrm>
-            <a:off x="7414767" y="2185415"/>
-            <a:ext cx="1583944" cy="457200"/>
+            <a:off x="7515724" y="2185415"/>
+            <a:ext cx="1356212" cy="457200"/>
           </a:xfrm>
           <a:prstGeom prst="rect">
             <a:avLst/>
@@ -5611,7 +5611,7 @@
         </p:spPr>
         <p:txBody>
           <a:bodyPr wrap="none" lIns="45720" rIns="45720" tIns="18288" bIns="18288" anchor="ctr">
-            <a:spAutoFit/>
+            <a:noAutofit/>
           </a:bodyPr>
           <a:lstStyle/>
           <a:p>
@@ -5644,7 +5644,7 @@
         </p:blipFill>
         <p:spPr>
           <a:xfrm>
-            <a:off x="8861552" y="2194560"/>
+            <a:off x="8734776" y="2194560"/>
             <a:ext cx="2011680" cy="438912"/>
           </a:xfrm>
           <a:prstGeom prst="rect">
@@ -5660,8 +5660,8 @@
         </p:nvSpPr>
         <p:spPr>
           <a:xfrm>
-            <a:off x="10873232" y="2185415"/>
-            <a:ext cx="553720" cy="457200"/>
+            <a:off x="10746456" y="2185415"/>
+            <a:ext cx="462987" cy="457200"/>
           </a:xfrm>
           <a:prstGeom prst="rect">
             <a:avLst/>
@@ -5670,7 +5670,7 @@
         </p:spPr>
         <p:txBody>
           <a:bodyPr wrap="none" lIns="45720" rIns="45720" tIns="18288" bIns="18288" anchor="ctr">
-            <a:spAutoFit/>
+            <a:noAutofit/>
           </a:bodyPr>
           <a:lstStyle/>
           <a:p>
@@ -7496,8 +7496,8 @@
         </p:nvSpPr>
         <p:spPr>
           <a:xfrm>
-            <a:off x="2966212" y="2171700"/>
-            <a:ext cx="1412240" cy="457200"/>
+            <a:off x="3136153" y="2171700"/>
+            <a:ext cx="1311040" cy="457200"/>
           </a:xfrm>
           <a:prstGeom prst="rect">
             <a:avLst/>
@@ -7506,7 +7506,7 @@
         </p:spPr>
         <p:txBody>
           <a:bodyPr wrap="none" lIns="45720" rIns="45720" tIns="18288" bIns="18288" anchor="ctr">
-            <a:spAutoFit/>
+            <a:noAutofit/>
           </a:bodyPr>
           <a:lstStyle/>
           <a:p>
@@ -7539,7 +7539,7 @@
         </p:blipFill>
         <p:spPr>
           <a:xfrm>
-            <a:off x="4241292" y="2225040"/>
+            <a:off x="4310034" y="2225040"/>
             <a:ext cx="1618488" cy="350520"/>
           </a:xfrm>
           <a:prstGeom prst="rect">
@@ -7555,8 +7555,8 @@
         </p:nvSpPr>
         <p:spPr>
           <a:xfrm>
-            <a:off x="5859780" y="2171700"/>
-            <a:ext cx="3472688" cy="457200"/>
+            <a:off x="5928522" y="2171700"/>
+            <a:ext cx="3234003" cy="457200"/>
           </a:xfrm>
           <a:prstGeom prst="rect">
             <a:avLst/>
@@ -7565,7 +7565,7 @@
         </p:spPr>
         <p:txBody>
           <a:bodyPr wrap="none" lIns="45720" rIns="45720" tIns="18288" bIns="18288" anchor="ctr">
-            <a:spAutoFit/>
+            <a:noAutofit/>
           </a:bodyPr>
           <a:lstStyle/>
           <a:p>
@@ -7924,7 +7924,7 @@
         <p:spPr>
           <a:xfrm>
             <a:off x="1874519" y="1760220"/>
-            <a:ext cx="7197344" cy="457200"/>
+            <a:ext cx="6249754" cy="457200"/>
           </a:xfrm>
           <a:prstGeom prst="rect">
             <a:avLst/>
@@ -7933,7 +7933,7 @@
         </p:spPr>
         <p:txBody>
           <a:bodyPr wrap="none" lIns="45720" rIns="45720" tIns="18288" bIns="18288" anchor="ctr">
-            <a:spAutoFit/>
+            <a:noAutofit/>
           </a:bodyPr>
           <a:lstStyle/>
           <a:p>
@@ -7959,7 +7959,7 @@
         <p:spPr>
           <a:xfrm>
             <a:off x="1874519" y="2372868"/>
-            <a:ext cx="2033015" cy="457200"/>
+            <a:ext cx="1700544" cy="457200"/>
           </a:xfrm>
           <a:prstGeom prst="rect">
             <a:avLst/>
@@ -7968,7 +7968,7 @@
         </p:spPr>
         <p:txBody>
           <a:bodyPr wrap="none" lIns="45720" rIns="45720" tIns="18288" bIns="18288" anchor="ctr">
-            <a:spAutoFit/>
+            <a:noAutofit/>
           </a:bodyPr>
           <a:lstStyle/>
           <a:p>
@@ -8001,7 +8001,7 @@
         </p:blipFill>
         <p:spPr>
           <a:xfrm>
-            <a:off x="3770375" y="2461260"/>
+            <a:off x="3437904" y="2461260"/>
             <a:ext cx="557784" cy="280416"/>
           </a:xfrm>
           <a:prstGeom prst="rect">
@@ -8017,8 +8017,8 @@
         </p:nvSpPr>
         <p:spPr>
           <a:xfrm>
-            <a:off x="4328160" y="2372868"/>
-            <a:ext cx="2640584" cy="457200"/>
+            <a:off x="3995688" y="2372868"/>
+            <a:ext cx="2239077" cy="457200"/>
           </a:xfrm>
           <a:prstGeom prst="rect">
             <a:avLst/>
@@ -8027,7 +8027,7 @@
         </p:spPr>
         <p:txBody>
           <a:bodyPr wrap="none" lIns="45720" rIns="45720" tIns="18288" bIns="18288" anchor="ctr">
-            <a:spAutoFit/>
+            <a:noAutofit/>
           </a:bodyPr>
           <a:lstStyle/>
           <a:p>
@@ -8053,7 +8053,7 @@
         <p:spPr>
           <a:xfrm>
             <a:off x="1874519" y="2985516"/>
-            <a:ext cx="969771" cy="457200"/>
+            <a:ext cx="726811" cy="457200"/>
           </a:xfrm>
           <a:prstGeom prst="rect">
             <a:avLst/>
@@ -8062,7 +8062,7 @@
         </p:spPr>
         <p:txBody>
           <a:bodyPr wrap="none" lIns="45720" rIns="45720" tIns="18288" bIns="18288" anchor="ctr">
-            <a:spAutoFit/>
+            <a:noAutofit/>
           </a:bodyPr>
           <a:lstStyle/>
           <a:p>
@@ -8095,7 +8095,7 @@
         </p:blipFill>
         <p:spPr>
           <a:xfrm>
-            <a:off x="2707132" y="3009900"/>
+            <a:off x="2464171" y="3009900"/>
             <a:ext cx="688848" cy="408432"/>
           </a:xfrm>
           <a:prstGeom prst="rect">
@@ -8111,8 +8111,8 @@
         </p:nvSpPr>
         <p:spPr>
           <a:xfrm>
-            <a:off x="3395980" y="2985516"/>
-            <a:ext cx="5830316" cy="457200"/>
+            <a:off x="3153019" y="2985516"/>
+            <a:ext cx="5819653" cy="457200"/>
           </a:xfrm>
           <a:prstGeom prst="rect">
             <a:avLst/>
@@ -8121,7 +8121,7 @@
         </p:spPr>
         <p:txBody>
           <a:bodyPr wrap="none" lIns="45720" rIns="45720" tIns="18288" bIns="18288" anchor="ctr">
-            <a:spAutoFit/>
+            <a:noAutofit/>
           </a:bodyPr>
           <a:lstStyle/>
           <a:p>
@@ -8147,7 +8147,7 @@
         <p:spPr>
           <a:xfrm>
             <a:off x="1874519" y="3598164"/>
-            <a:ext cx="5222748" cy="457200"/>
+            <a:ext cx="4504058" cy="457200"/>
           </a:xfrm>
           <a:prstGeom prst="rect">
             <a:avLst/>
@@ -8156,7 +8156,7 @@
         </p:spPr>
         <p:txBody>
           <a:bodyPr wrap="none" lIns="45720" rIns="45720" tIns="18288" bIns="18288" anchor="ctr">
-            <a:spAutoFit/>
+            <a:noAutofit/>
           </a:bodyPr>
           <a:lstStyle/>
           <a:p>
@@ -8444,8 +8444,8 @@
         </p:nvSpPr>
         <p:spPr>
           <a:xfrm>
-            <a:off x="2966212" y="2080260"/>
-            <a:ext cx="1412240" cy="457200"/>
+            <a:off x="3136153" y="2080260"/>
+            <a:ext cx="1311040" cy="457200"/>
           </a:xfrm>
           <a:prstGeom prst="rect">
             <a:avLst/>
@@ -8454,7 +8454,7 @@
         </p:spPr>
         <p:txBody>
           <a:bodyPr wrap="none" lIns="45720" rIns="45720" tIns="18288" bIns="18288" anchor="ctr">
-            <a:spAutoFit/>
+            <a:noAutofit/>
           </a:bodyPr>
           <a:lstStyle/>
           <a:p>
@@ -8487,7 +8487,7 @@
         </p:blipFill>
         <p:spPr>
           <a:xfrm>
-            <a:off x="4241292" y="2133599"/>
+            <a:off x="4310034" y="2133599"/>
             <a:ext cx="1618488" cy="350520"/>
           </a:xfrm>
           <a:prstGeom prst="rect">
@@ -8503,8 +8503,8 @@
         </p:nvSpPr>
         <p:spPr>
           <a:xfrm>
-            <a:off x="5859780" y="2080260"/>
-            <a:ext cx="3472688" cy="457200"/>
+            <a:off x="5928522" y="2080260"/>
+            <a:ext cx="3234003" cy="457200"/>
           </a:xfrm>
           <a:prstGeom prst="rect">
             <a:avLst/>
@@ -8513,7 +8513,7 @@
         </p:spPr>
         <p:txBody>
           <a:bodyPr wrap="none" lIns="45720" rIns="45720" tIns="18288" bIns="18288" anchor="ctr">
-            <a:spAutoFit/>
+            <a:noAutofit/>
           </a:bodyPr>
           <a:lstStyle/>
           <a:p>
@@ -10855,8 +10855,8 @@
         </p:nvSpPr>
         <p:spPr>
           <a:xfrm>
-            <a:off x="1580387" y="2171700"/>
-            <a:ext cx="4674616" cy="457200"/>
+            <a:off x="1797895" y="2171700"/>
+            <a:ext cx="4558064" cy="457200"/>
           </a:xfrm>
           <a:prstGeom prst="rect">
             <a:avLst/>
@@ -10865,7 +10865,7 @@
         </p:spPr>
         <p:txBody>
           <a:bodyPr wrap="none" lIns="45720" rIns="45720" tIns="18288" bIns="18288" anchor="ctr">
-            <a:spAutoFit/>
+            <a:noAutofit/>
           </a:bodyPr>
           <a:lstStyle/>
           <a:p>
@@ -10898,7 +10898,7 @@
         </p:blipFill>
         <p:spPr>
           <a:xfrm>
-            <a:off x="6117844" y="2225040"/>
+            <a:off x="6218800" y="2225040"/>
             <a:ext cx="1298448" cy="350520"/>
           </a:xfrm>
           <a:prstGeom prst="rect">
@@ -10914,8 +10914,8 @@
         </p:nvSpPr>
         <p:spPr>
           <a:xfrm>
-            <a:off x="7416292" y="2171700"/>
-            <a:ext cx="1583944" cy="457200"/>
+            <a:off x="7517248" y="2171700"/>
+            <a:ext cx="1356212" cy="457200"/>
           </a:xfrm>
           <a:prstGeom prst="rect">
             <a:avLst/>
@@ -10924,7 +10924,7 @@
         </p:spPr>
         <p:txBody>
           <a:bodyPr wrap="none" lIns="45720" rIns="45720" tIns="18288" bIns="18288" anchor="ctr">
-            <a:spAutoFit/>
+            <a:noAutofit/>
           </a:bodyPr>
           <a:lstStyle/>
           <a:p>
@@ -10957,7 +10957,7 @@
         </p:blipFill>
         <p:spPr>
           <a:xfrm>
-            <a:off x="8863076" y="2223516"/>
+            <a:off x="8736300" y="2223516"/>
             <a:ext cx="1301496" cy="353568"/>
           </a:xfrm>
           <a:prstGeom prst="rect">
@@ -10973,8 +10973,8 @@
         </p:nvSpPr>
         <p:spPr>
           <a:xfrm>
-            <a:off x="10164572" y="2171700"/>
-            <a:ext cx="553720" cy="457200"/>
+            <a:off x="10037796" y="2171700"/>
+            <a:ext cx="462987" cy="457200"/>
           </a:xfrm>
           <a:prstGeom prst="rect">
             <a:avLst/>
@@ -10983,7 +10983,7 @@
         </p:spPr>
         <p:txBody>
           <a:bodyPr wrap="none" lIns="45720" rIns="45720" tIns="18288" bIns="18288" anchor="ctr">
-            <a:spAutoFit/>
+            <a:noAutofit/>
           </a:bodyPr>
           <a:lstStyle/>
           <a:p>
@@ -11482,8 +11482,8 @@
         </p:nvSpPr>
         <p:spPr>
           <a:xfrm>
-            <a:off x="1580387" y="2080260"/>
-            <a:ext cx="4674616" cy="457200"/>
+            <a:off x="1797895" y="2080260"/>
+            <a:ext cx="4558064" cy="457200"/>
           </a:xfrm>
           <a:prstGeom prst="rect">
             <a:avLst/>
@@ -11492,7 +11492,7 @@
         </p:spPr>
         <p:txBody>
           <a:bodyPr wrap="none" lIns="45720" rIns="45720" tIns="18288" bIns="18288" anchor="ctr">
-            <a:spAutoFit/>
+            <a:noAutofit/>
           </a:bodyPr>
           <a:lstStyle/>
           <a:p>
@@ -11525,7 +11525,7 @@
         </p:blipFill>
         <p:spPr>
           <a:xfrm>
-            <a:off x="6117844" y="2133599"/>
+            <a:off x="6218800" y="2133599"/>
             <a:ext cx="1298448" cy="350520"/>
           </a:xfrm>
           <a:prstGeom prst="rect">
@@ -11541,8 +11541,8 @@
         </p:nvSpPr>
         <p:spPr>
           <a:xfrm>
-            <a:off x="7416292" y="2080260"/>
-            <a:ext cx="1583944" cy="457200"/>
+            <a:off x="7517248" y="2080260"/>
+            <a:ext cx="1356212" cy="457200"/>
           </a:xfrm>
           <a:prstGeom prst="rect">
             <a:avLst/>
@@ -11551,7 +11551,7 @@
         </p:spPr>
         <p:txBody>
           <a:bodyPr wrap="none" lIns="45720" rIns="45720" tIns="18288" bIns="18288" anchor="ctr">
-            <a:spAutoFit/>
+            <a:noAutofit/>
           </a:bodyPr>
           <a:lstStyle/>
           <a:p>
@@ -11584,7 +11584,7 @@
         </p:blipFill>
         <p:spPr>
           <a:xfrm>
-            <a:off x="8863076" y="2132076"/>
+            <a:off x="8736300" y="2132076"/>
             <a:ext cx="1301496" cy="353568"/>
           </a:xfrm>
           <a:prstGeom prst="rect">
@@ -11600,8 +11600,8 @@
         </p:nvSpPr>
         <p:spPr>
           <a:xfrm>
-            <a:off x="10164572" y="2080260"/>
-            <a:ext cx="553720" cy="457200"/>
+            <a:off x="10037796" y="2080260"/>
+            <a:ext cx="462987" cy="457200"/>
           </a:xfrm>
           <a:prstGeom prst="rect">
             <a:avLst/>
@@ -11610,7 +11610,7 @@
         </p:spPr>
         <p:txBody>
           <a:bodyPr wrap="none" lIns="45720" rIns="45720" tIns="18288" bIns="18288" anchor="ctr">
-            <a:spAutoFit/>
+            <a:noAutofit/>
           </a:bodyPr>
           <a:lstStyle/>
           <a:p>
@@ -12109,8 +12109,8 @@
         </p:nvSpPr>
         <p:spPr>
           <a:xfrm>
-            <a:off x="2046731" y="2171700"/>
-            <a:ext cx="3472688" cy="457200"/>
+            <a:off x="2400756" y="2171700"/>
+            <a:ext cx="3166062" cy="457200"/>
           </a:xfrm>
           <a:prstGeom prst="rect">
             <a:avLst/>
@@ -12119,7 +12119,7 @@
         </p:spPr>
         <p:txBody>
           <a:bodyPr wrap="none" lIns="45720" rIns="45720" tIns="18288" bIns="18288" anchor="ctr">
-            <a:spAutoFit/>
+            <a:noAutofit/>
           </a:bodyPr>
           <a:lstStyle/>
           <a:p>
@@ -12152,7 +12152,7 @@
         </p:blipFill>
         <p:spPr>
           <a:xfrm>
-            <a:off x="5382260" y="2223516"/>
+            <a:off x="5429658" y="2223516"/>
             <a:ext cx="1600200" cy="353568"/>
           </a:xfrm>
           <a:prstGeom prst="rect">
@@ -12168,8 +12168,8 @@
         </p:nvSpPr>
         <p:spPr>
           <a:xfrm>
-            <a:off x="6982460" y="2171700"/>
-            <a:ext cx="1240536" cy="457200"/>
+            <a:off x="7029858" y="2171700"/>
+            <a:ext cx="929845" cy="457200"/>
           </a:xfrm>
           <a:prstGeom prst="rect">
             <a:avLst/>
@@ -12178,7 +12178,7 @@
         </p:spPr>
         <p:txBody>
           <a:bodyPr wrap="none" lIns="45720" rIns="45720" tIns="18288" bIns="18288" anchor="ctr">
-            <a:spAutoFit/>
+            <a:noAutofit/>
           </a:bodyPr>
           <a:lstStyle/>
           <a:p>
@@ -12211,7 +12211,7 @@
         </p:blipFill>
         <p:spPr>
           <a:xfrm>
-            <a:off x="8085836" y="2225040"/>
+            <a:off x="7822544" y="2225040"/>
             <a:ext cx="1612392" cy="350520"/>
           </a:xfrm>
           <a:prstGeom prst="rect">
@@ -12227,8 +12227,8 @@
         </p:nvSpPr>
         <p:spPr>
           <a:xfrm>
-            <a:off x="9698228" y="2171700"/>
-            <a:ext cx="553720" cy="457200"/>
+            <a:off x="9434936" y="2171700"/>
+            <a:ext cx="462987" cy="457200"/>
           </a:xfrm>
           <a:prstGeom prst="rect">
             <a:avLst/>
@@ -12237,7 +12237,7 @@
         </p:spPr>
         <p:txBody>
           <a:bodyPr wrap="none" lIns="45720" rIns="45720" tIns="18288" bIns="18288" anchor="ctr">
-            <a:spAutoFit/>
+            <a:noAutofit/>
           </a:bodyPr>
           <a:lstStyle/>
           <a:p>
@@ -12595,8 +12595,8 @@
         </p:nvSpPr>
         <p:spPr>
           <a:xfrm>
-            <a:off x="2046731" y="2080260"/>
-            <a:ext cx="3472688" cy="457200"/>
+            <a:off x="2400756" y="2080260"/>
+            <a:ext cx="3166062" cy="457200"/>
           </a:xfrm>
           <a:prstGeom prst="rect">
             <a:avLst/>
@@ -12605,7 +12605,7 @@
         </p:spPr>
         <p:txBody>
           <a:bodyPr wrap="none" lIns="45720" rIns="45720" tIns="18288" bIns="18288" anchor="ctr">
-            <a:spAutoFit/>
+            <a:noAutofit/>
           </a:bodyPr>
           <a:lstStyle/>
           <a:p>
@@ -12638,7 +12638,7 @@
         </p:blipFill>
         <p:spPr>
           <a:xfrm>
-            <a:off x="5382260" y="2132076"/>
+            <a:off x="5429658" y="2132076"/>
             <a:ext cx="1600200" cy="353568"/>
           </a:xfrm>
           <a:prstGeom prst="rect">
@@ -12654,8 +12654,8 @@
         </p:nvSpPr>
         <p:spPr>
           <a:xfrm>
-            <a:off x="6982460" y="2080260"/>
-            <a:ext cx="1240536" cy="457200"/>
+            <a:off x="7029858" y="2080260"/>
+            <a:ext cx="929845" cy="457200"/>
           </a:xfrm>
           <a:prstGeom prst="rect">
             <a:avLst/>
@@ -12664,7 +12664,7 @@
         </p:spPr>
         <p:txBody>
           <a:bodyPr wrap="none" lIns="45720" rIns="45720" tIns="18288" bIns="18288" anchor="ctr">
-            <a:spAutoFit/>
+            <a:noAutofit/>
           </a:bodyPr>
           <a:lstStyle/>
           <a:p>
@@ -12697,7 +12697,7 @@
         </p:blipFill>
         <p:spPr>
           <a:xfrm>
-            <a:off x="8085836" y="2133599"/>
+            <a:off x="7822544" y="2133599"/>
             <a:ext cx="1612392" cy="350520"/>
           </a:xfrm>
           <a:prstGeom prst="rect">
@@ -12713,8 +12713,8 @@
         </p:nvSpPr>
         <p:spPr>
           <a:xfrm>
-            <a:off x="9698228" y="2080260"/>
-            <a:ext cx="553720" cy="457200"/>
+            <a:off x="9434936" y="2080260"/>
+            <a:ext cx="462987" cy="457200"/>
           </a:xfrm>
           <a:prstGeom prst="rect">
             <a:avLst/>
@@ -12723,7 +12723,7 @@
         </p:spPr>
         <p:txBody>
           <a:bodyPr wrap="none" lIns="45720" rIns="45720" tIns="18288" bIns="18288" anchor="ctr">
-            <a:spAutoFit/>
+            <a:noAutofit/>
           </a:bodyPr>
           <a:lstStyle/>
           <a:p>
@@ -13530,7 +13530,7 @@
         <p:spPr>
           <a:xfrm>
             <a:off x="1874519" y="1760220"/>
-            <a:ext cx="7197344" cy="457200"/>
+            <a:ext cx="6249754" cy="457200"/>
           </a:xfrm>
           <a:prstGeom prst="rect">
             <a:avLst/>
@@ -13539,7 +13539,7 @@
         </p:spPr>
         <p:txBody>
           <a:bodyPr wrap="none" lIns="45720" rIns="45720" tIns="18288" bIns="18288" anchor="ctr">
-            <a:spAutoFit/>
+            <a:noAutofit/>
           </a:bodyPr>
           <a:lstStyle/>
           <a:p>
@@ -13564,8 +13564,8 @@
         </p:nvSpPr>
         <p:spPr>
           <a:xfrm>
-            <a:off x="9483344" y="1760220"/>
-            <a:ext cx="1735074" cy="457200"/>
+            <a:off x="8535754" y="1760220"/>
+            <a:ext cx="1459438" cy="457200"/>
           </a:xfrm>
           <a:prstGeom prst="rect">
             <a:avLst/>
@@ -13574,7 +13574,7 @@
         </p:spPr>
         <p:txBody>
           <a:bodyPr wrap="none" lIns="45720" rIns="45720" tIns="18288" bIns="18288" anchor="ctr">
-            <a:spAutoFit/>
+            <a:noAutofit/>
           </a:bodyPr>
           <a:lstStyle/>
           <a:p>
@@ -13609,7 +13609,7 @@
         <p:spPr>
           <a:xfrm>
             <a:off x="1874519" y="2372868"/>
-            <a:ext cx="2033015" cy="457200"/>
+            <a:ext cx="1700544" cy="457200"/>
           </a:xfrm>
           <a:prstGeom prst="rect">
             <a:avLst/>
@@ -13618,7 +13618,7 @@
         </p:spPr>
         <p:txBody>
           <a:bodyPr wrap="none" lIns="45720" rIns="45720" tIns="18288" bIns="18288" anchor="ctr">
-            <a:spAutoFit/>
+            <a:noAutofit/>
           </a:bodyPr>
           <a:lstStyle/>
           <a:p>
@@ -13651,7 +13651,7 @@
         </p:blipFill>
         <p:spPr>
           <a:xfrm>
-            <a:off x="3770375" y="2461260"/>
+            <a:off x="3437904" y="2461260"/>
             <a:ext cx="557784" cy="280416"/>
           </a:xfrm>
           <a:prstGeom prst="rect">
@@ -13667,8 +13667,8 @@
         </p:nvSpPr>
         <p:spPr>
           <a:xfrm>
-            <a:off x="4328160" y="2372868"/>
-            <a:ext cx="2640584" cy="457200"/>
+            <a:off x="3995688" y="2372868"/>
+            <a:ext cx="2239077" cy="457200"/>
           </a:xfrm>
           <a:prstGeom prst="rect">
             <a:avLst/>
@@ -13677,7 +13677,7 @@
         </p:spPr>
         <p:txBody>
           <a:bodyPr wrap="none" lIns="45720" rIns="45720" tIns="18288" bIns="18288" anchor="ctr">
-            <a:spAutoFit/>
+            <a:noAutofit/>
           </a:bodyPr>
           <a:lstStyle/>
           <a:p>
@@ -13696,7 +13696,7 @@
       </p:sp>
       <p:pic>
         <p:nvPicPr>
-          <p:cNvPr id="14" name="Picture 13" descr="2c83e1be945e2c3f.png"/>
+          <p:cNvPr id="14" name="Picture 13" descr="357ee64ca77eb39d.png"/>
           <p:cNvPicPr>
             <a:picLocks noChangeAspect="1"/>
           </p:cNvPicPr>
@@ -13710,8 +13710,8 @@
         </p:blipFill>
         <p:spPr>
           <a:xfrm>
-            <a:off x="7380224" y="2395728"/>
-            <a:ext cx="524256" cy="454152"/>
+            <a:off x="6646246" y="2395728"/>
+            <a:ext cx="746760" cy="600456"/>
           </a:xfrm>
           <a:prstGeom prst="rect">
             <a:avLst/>
@@ -13727,7 +13727,7 @@
         <p:spPr>
           <a:xfrm>
             <a:off x="1874519" y="2985516"/>
-            <a:ext cx="969771" cy="457200"/>
+            <a:ext cx="726811" cy="457200"/>
           </a:xfrm>
           <a:prstGeom prst="rect">
             <a:avLst/>
@@ -13736,7 +13736,7 @@
         </p:spPr>
         <p:txBody>
           <a:bodyPr wrap="none" lIns="45720" rIns="45720" tIns="18288" bIns="18288" anchor="ctr">
-            <a:spAutoFit/>
+            <a:noAutofit/>
           </a:bodyPr>
           <a:lstStyle/>
           <a:p>
@@ -13769,7 +13769,7 @@
         </p:blipFill>
         <p:spPr>
           <a:xfrm>
-            <a:off x="2707132" y="3009900"/>
+            <a:off x="2464171" y="3009900"/>
             <a:ext cx="688848" cy="408432"/>
           </a:xfrm>
           <a:prstGeom prst="rect">
@@ -13785,8 +13785,8 @@
         </p:nvSpPr>
         <p:spPr>
           <a:xfrm>
-            <a:off x="3395980" y="2985516"/>
-            <a:ext cx="5830316" cy="457200"/>
+            <a:off x="3153019" y="2985516"/>
+            <a:ext cx="5819653" cy="457200"/>
           </a:xfrm>
           <a:prstGeom prst="rect">
             <a:avLst/>
@@ -13795,7 +13795,7 @@
         </p:spPr>
         <p:txBody>
           <a:bodyPr wrap="none" lIns="45720" rIns="45720" tIns="18288" bIns="18288" anchor="ctr">
-            <a:spAutoFit/>
+            <a:noAutofit/>
           </a:bodyPr>
           <a:lstStyle/>
           <a:p>
@@ -13820,8 +13820,8 @@
         </p:nvSpPr>
         <p:spPr>
           <a:xfrm>
-            <a:off x="9637776" y="2985516"/>
-            <a:ext cx="1565655" cy="457200"/>
+            <a:off x="9384153" y="2985516"/>
+            <a:ext cx="1529062" cy="457200"/>
           </a:xfrm>
           <a:prstGeom prst="rect">
             <a:avLst/>
@@ -13830,7 +13830,7 @@
         </p:spPr>
         <p:txBody>
           <a:bodyPr wrap="none" lIns="45720" rIns="45720" tIns="18288" bIns="18288" anchor="ctr">
-            <a:spAutoFit/>
+            <a:noAutofit/>
           </a:bodyPr>
           <a:lstStyle/>
           <a:p>
@@ -13856,7 +13856,7 @@
         <p:spPr>
           <a:xfrm>
             <a:off x="1874519" y="3598164"/>
-            <a:ext cx="5222748" cy="457200"/>
+            <a:ext cx="4504058" cy="457200"/>
           </a:xfrm>
           <a:prstGeom prst="rect">
             <a:avLst/>
@@ -13865,7 +13865,7 @@
         </p:spPr>
         <p:txBody>
           <a:bodyPr wrap="none" lIns="45720" rIns="45720" tIns="18288" bIns="18288" anchor="ctr">
-            <a:spAutoFit/>
+            <a:noAutofit/>
           </a:bodyPr>
           <a:lstStyle/>
           <a:p>
@@ -13884,7 +13884,7 @@
       </p:sp>
       <p:pic>
         <p:nvPicPr>
-          <p:cNvPr id="20" name="Picture 19" descr="37720568f3db2afb.png"/>
+          <p:cNvPr id="20" name="Picture 19" descr="0d671d8905812bd4.png"/>
           <p:cNvPicPr>
             <a:picLocks noChangeAspect="1"/>
           </p:cNvPicPr>
@@ -13898,8 +13898,8 @@
         </p:blipFill>
         <p:spPr>
           <a:xfrm>
-            <a:off x="7508747" y="3621024"/>
-            <a:ext cx="524256" cy="451104"/>
+            <a:off x="6790058" y="3621024"/>
+            <a:ext cx="746760" cy="597408"/>
           </a:xfrm>
           <a:prstGeom prst="rect">
             <a:avLst/>
@@ -14589,8 +14589,8 @@
         </p:nvSpPr>
         <p:spPr>
           <a:xfrm>
-            <a:off x="2603499" y="2171700"/>
-            <a:ext cx="3472688" cy="457200"/>
+            <a:off x="2977665" y="2171700"/>
+            <a:ext cx="3062993" cy="457200"/>
           </a:xfrm>
           <a:prstGeom prst="rect">
             <a:avLst/>
@@ -14599,7 +14599,7 @@
         </p:spPr>
         <p:txBody>
           <a:bodyPr wrap="none" lIns="45720" rIns="45720" tIns="18288" bIns="18288" anchor="ctr">
-            <a:spAutoFit/>
+            <a:noAutofit/>
           </a:bodyPr>
           <a:lstStyle/>
           <a:p>
@@ -14632,7 +14632,7 @@
         </p:blipFill>
         <p:spPr>
           <a:xfrm>
-            <a:off x="5939027" y="2226564"/>
+            <a:off x="5903499" y="2226564"/>
             <a:ext cx="1313688" cy="347472"/>
           </a:xfrm>
           <a:prstGeom prst="rect">
@@ -14648,8 +14648,8 @@
         </p:nvSpPr>
         <p:spPr>
           <a:xfrm>
-            <a:off x="7252715" y="2171700"/>
-            <a:ext cx="2442464" cy="457200"/>
+            <a:off x="7217187" y="2171700"/>
+            <a:ext cx="2103826" cy="457200"/>
           </a:xfrm>
           <a:prstGeom prst="rect">
             <a:avLst/>
@@ -14658,7 +14658,7 @@
         </p:spPr>
         <p:txBody>
           <a:bodyPr wrap="none" lIns="45720" rIns="45720" tIns="18288" bIns="18288" anchor="ctr">
-            <a:spAutoFit/>
+            <a:noAutofit/>
           </a:bodyPr>
           <a:lstStyle/>
           <a:p>
@@ -14683,8 +14683,8 @@
         </p:nvSpPr>
         <p:spPr>
           <a:xfrm>
-            <a:off x="2605024" y="2857500"/>
-            <a:ext cx="3472688" cy="457200"/>
+            <a:off x="2979189" y="2857500"/>
+            <a:ext cx="3062993" cy="457200"/>
           </a:xfrm>
           <a:prstGeom prst="rect">
             <a:avLst/>
@@ -14693,7 +14693,7 @@
         </p:spPr>
         <p:txBody>
           <a:bodyPr wrap="none" lIns="45720" rIns="45720" tIns="18288" bIns="18288" anchor="ctr">
-            <a:spAutoFit/>
+            <a:noAutofit/>
           </a:bodyPr>
           <a:lstStyle/>
           <a:p>
@@ -14726,7 +14726,7 @@
         </p:blipFill>
         <p:spPr>
           <a:xfrm>
-            <a:off x="5940551" y="2912364"/>
+            <a:off x="5905023" y="2912364"/>
             <a:ext cx="1310640" cy="347472"/>
           </a:xfrm>
           <a:prstGeom prst="rect">
@@ -14742,8 +14742,8 @@
         </p:nvSpPr>
         <p:spPr>
           <a:xfrm>
-            <a:off x="7251192" y="2857500"/>
-            <a:ext cx="2442464" cy="457200"/>
+            <a:off x="7215663" y="2857500"/>
+            <a:ext cx="2103826" cy="457200"/>
           </a:xfrm>
           <a:prstGeom prst="rect">
             <a:avLst/>
@@ -14752,7 +14752,7 @@
         </p:spPr>
         <p:txBody>
           <a:bodyPr wrap="none" lIns="45720" rIns="45720" tIns="18288" bIns="18288" anchor="ctr">
-            <a:spAutoFit/>
+            <a:noAutofit/>
           </a:bodyPr>
           <a:lstStyle/>
           <a:p>
@@ -15145,8 +15145,8 @@
         </p:nvSpPr>
         <p:spPr>
           <a:xfrm>
-            <a:off x="2603499" y="2080260"/>
-            <a:ext cx="3472688" cy="457200"/>
+            <a:off x="2977665" y="2080260"/>
+            <a:ext cx="3062993" cy="457200"/>
           </a:xfrm>
           <a:prstGeom prst="rect">
             <a:avLst/>
@@ -15155,7 +15155,7 @@
         </p:spPr>
         <p:txBody>
           <a:bodyPr wrap="none" lIns="45720" rIns="45720" tIns="18288" bIns="18288" anchor="ctr">
-            <a:spAutoFit/>
+            <a:noAutofit/>
           </a:bodyPr>
           <a:lstStyle/>
           <a:p>
@@ -15188,7 +15188,7 @@
         </p:blipFill>
         <p:spPr>
           <a:xfrm>
-            <a:off x="5939027" y="2135124"/>
+            <a:off x="5903499" y="2135124"/>
             <a:ext cx="1313688" cy="347472"/>
           </a:xfrm>
           <a:prstGeom prst="rect">
@@ -15204,8 +15204,8 @@
         </p:nvSpPr>
         <p:spPr>
           <a:xfrm>
-            <a:off x="7252715" y="2080260"/>
-            <a:ext cx="2442464" cy="457200"/>
+            <a:off x="7217187" y="2080260"/>
+            <a:ext cx="2103826" cy="457200"/>
           </a:xfrm>
           <a:prstGeom prst="rect">
             <a:avLst/>
@@ -15214,7 +15214,7 @@
         </p:spPr>
         <p:txBody>
           <a:bodyPr wrap="none" lIns="45720" rIns="45720" tIns="18288" bIns="18288" anchor="ctr">
-            <a:spAutoFit/>
+            <a:noAutofit/>
           </a:bodyPr>
           <a:lstStyle/>
           <a:p>
@@ -15239,8 +15239,8 @@
         </p:nvSpPr>
         <p:spPr>
           <a:xfrm>
-            <a:off x="2605024" y="2766060"/>
-            <a:ext cx="3472688" cy="457200"/>
+            <a:off x="2979189" y="2766060"/>
+            <a:ext cx="3062993" cy="457200"/>
           </a:xfrm>
           <a:prstGeom prst="rect">
             <a:avLst/>
@@ -15249,7 +15249,7 @@
         </p:spPr>
         <p:txBody>
           <a:bodyPr wrap="none" lIns="45720" rIns="45720" tIns="18288" bIns="18288" anchor="ctr">
-            <a:spAutoFit/>
+            <a:noAutofit/>
           </a:bodyPr>
           <a:lstStyle/>
           <a:p>
@@ -15282,7 +15282,7 @@
         </p:blipFill>
         <p:spPr>
           <a:xfrm>
-            <a:off x="5940551" y="2820924"/>
+            <a:off x="5905023" y="2820924"/>
             <a:ext cx="1310640" cy="347472"/>
           </a:xfrm>
           <a:prstGeom prst="rect">
@@ -15298,8 +15298,8 @@
         </p:nvSpPr>
         <p:spPr>
           <a:xfrm>
-            <a:off x="7251192" y="2766060"/>
-            <a:ext cx="2442464" cy="457200"/>
+            <a:off x="7215663" y="2766060"/>
+            <a:ext cx="2103826" cy="457200"/>
           </a:xfrm>
           <a:prstGeom prst="rect">
             <a:avLst/>
@@ -15308,7 +15308,7 @@
         </p:spPr>
         <p:txBody>
           <a:bodyPr wrap="none" lIns="45720" rIns="45720" tIns="18288" bIns="18288" anchor="ctr">
-            <a:spAutoFit/>
+            <a:noAutofit/>
           </a:bodyPr>
           <a:lstStyle/>
           <a:p>
@@ -17521,7 +17521,7 @@
       </p:graphicFrame>
       <p:pic>
         <p:nvPicPr>
-          <p:cNvPr id="12" name="Picture 11" descr="3d7aaea0752b01d0.png"/>
+          <p:cNvPr id="12" name="Picture 11" descr="655d8151b1ce1ed1.png"/>
           <p:cNvPicPr>
             <a:picLocks noChangeAspect="1"/>
           </p:cNvPicPr>
@@ -17535,8 +17535,8 @@
         </p:blipFill>
         <p:spPr>
           <a:xfrm>
-            <a:off x="2882900" y="3357372"/>
-            <a:ext cx="1527048" cy="515112"/>
+            <a:off x="3032496" y="3363468"/>
+            <a:ext cx="1697736" cy="679704"/>
           </a:xfrm>
           <a:prstGeom prst="rect">
             <a:avLst/>
@@ -17551,8 +17551,8 @@
         </p:nvSpPr>
         <p:spPr>
           <a:xfrm>
-            <a:off x="4409948" y="3386328"/>
-            <a:ext cx="1927352" cy="457200"/>
+            <a:off x="4730232" y="3474720"/>
+            <a:ext cx="1183151" cy="457200"/>
           </a:xfrm>
           <a:prstGeom prst="rect">
             <a:avLst/>
@@ -17561,7 +17561,7 @@
         </p:spPr>
         <p:txBody>
           <a:bodyPr wrap="none" lIns="45720" rIns="45720" tIns="18288" bIns="18288" anchor="ctr">
-            <a:spAutoFit/>
+            <a:noAutofit/>
           </a:bodyPr>
           <a:lstStyle/>
           <a:p>
@@ -17580,7 +17580,7 @@
       </p:sp>
       <p:pic>
         <p:nvPicPr>
-          <p:cNvPr id="14" name="Picture 13" descr="8a5f87d8cdcc7765.png"/>
+          <p:cNvPr id="14" name="Picture 13" descr="fbb93d80bc2542b2.png"/>
           <p:cNvPicPr>
             <a:picLocks noChangeAspect="1"/>
           </p:cNvPicPr>
@@ -17594,8 +17594,8 @@
         </p:blipFill>
         <p:spPr>
           <a:xfrm>
-            <a:off x="6200139" y="3337560"/>
-            <a:ext cx="3078480" cy="554736"/>
+            <a:off x="5776223" y="3337560"/>
+            <a:ext cx="3352800" cy="731520"/>
           </a:xfrm>
           <a:prstGeom prst="rect">
             <a:avLst/>
@@ -17610,7 +17610,7 @@
         </p:nvSpPr>
         <p:spPr>
           <a:xfrm>
-            <a:off x="987552" y="4230624"/>
+            <a:off x="987552" y="4407408"/>
             <a:ext cx="10131551" cy="950976"/>
           </a:xfrm>
           <a:prstGeom prst="rect">
@@ -17969,7 +17969,7 @@
         </p:blipFill>
         <p:spPr>
           <a:xfrm>
-            <a:off x="1602740" y="2369820"/>
+            <a:off x="1974840" y="2369820"/>
             <a:ext cx="3230880" cy="353568"/>
           </a:xfrm>
           <a:prstGeom prst="rect">
@@ -17985,8 +17985,8 @@
         </p:nvSpPr>
         <p:spPr>
           <a:xfrm>
-            <a:off x="4833620" y="2318004"/>
-            <a:ext cx="1927352" cy="457200"/>
+            <a:off x="5205720" y="2318004"/>
+            <a:ext cx="1183151" cy="457200"/>
           </a:xfrm>
           <a:prstGeom prst="rect">
             <a:avLst/>
@@ -17995,7 +17995,7 @@
         </p:spPr>
         <p:txBody>
           <a:bodyPr wrap="none" lIns="45720" rIns="45720" tIns="18288" bIns="18288" anchor="ctr">
-            <a:spAutoFit/>
+            <a:noAutofit/>
           </a:bodyPr>
           <a:lstStyle/>
           <a:p>
@@ -18028,7 +18028,7 @@
         </p:blipFill>
         <p:spPr>
           <a:xfrm>
-            <a:off x="6623812" y="2369820"/>
+            <a:off x="6251711" y="2369820"/>
             <a:ext cx="3934968" cy="353568"/>
           </a:xfrm>
           <a:prstGeom prst="rect">
@@ -18448,7 +18448,7 @@
       </p:cxnSp>
       <p:pic>
         <p:nvPicPr>
-          <p:cNvPr id="10" name="Picture 9" descr="fbb840de36f2f95e.png"/>
+          <p:cNvPr id="10" name="Picture 9" descr="7e65c605f1bd926f.png"/>
           <p:cNvPicPr>
             <a:picLocks noChangeAspect="1"/>
           </p:cNvPicPr>
@@ -18462,8 +18462,8 @@
         </p:blipFill>
         <p:spPr>
           <a:xfrm>
-            <a:off x="2114803" y="2342388"/>
-            <a:ext cx="4059936" cy="612648"/>
+            <a:off x="2037324" y="2342388"/>
+            <a:ext cx="4553712" cy="822960"/>
           </a:xfrm>
           <a:prstGeom prst="rect">
             <a:avLst/>
@@ -18478,8 +18478,8 @@
         </p:nvSpPr>
         <p:spPr>
           <a:xfrm>
-            <a:off x="6174740" y="2420112"/>
-            <a:ext cx="1927352" cy="457200"/>
+            <a:off x="6591036" y="2525268"/>
+            <a:ext cx="1183151" cy="457200"/>
           </a:xfrm>
           <a:prstGeom prst="rect">
             <a:avLst/>
@@ -18488,7 +18488,7 @@
         </p:spPr>
         <p:txBody>
           <a:bodyPr wrap="none" lIns="45720" rIns="45720" tIns="18288" bIns="18288" anchor="ctr">
-            <a:spAutoFit/>
+            <a:noAutofit/>
           </a:bodyPr>
           <a:lstStyle/>
           <a:p>
@@ -18507,7 +18507,7 @@
       </p:sp>
       <p:pic>
         <p:nvPicPr>
-          <p:cNvPr id="12" name="Picture 11" descr="8fe2228e38dc4f3e.png"/>
+          <p:cNvPr id="12" name="Picture 11" descr="a0ca7da1486902b7.png"/>
           <p:cNvPicPr>
             <a:picLocks noChangeAspect="1"/>
           </p:cNvPicPr>
@@ -18521,8 +18521,8 @@
         </p:blipFill>
         <p:spPr>
           <a:xfrm>
-            <a:off x="7964932" y="2340864"/>
-            <a:ext cx="2081784" cy="615696"/>
+            <a:off x="7637027" y="2340864"/>
+            <a:ext cx="2487168" cy="826008"/>
           </a:xfrm>
           <a:prstGeom prst="rect">
             <a:avLst/>
@@ -18537,7 +18537,7 @@
         </p:nvSpPr>
         <p:spPr>
           <a:xfrm>
-            <a:off x="987552" y="3294887"/>
+            <a:off x="987552" y="3505199"/>
             <a:ext cx="10131551" cy="950976"/>
           </a:xfrm>
           <a:prstGeom prst="rect">
@@ -18572,7 +18572,7 @@
         </p:nvSpPr>
         <p:spPr>
           <a:xfrm>
-            <a:off x="987552" y="4501896"/>
+            <a:off x="987552" y="4712208"/>
             <a:ext cx="10131551" cy="950976"/>
           </a:xfrm>
           <a:prstGeom prst="rect">
@@ -19251,7 +19251,7 @@
       </p:sp>
       <p:pic>
         <p:nvPicPr>
-          <p:cNvPr id="9" name="Picture 8" descr="731e5d72e296a9a0.png"/>
+          <p:cNvPr id="9" name="Picture 8" descr="98ef0913c0fc6250.png"/>
           <p:cNvPicPr>
             <a:picLocks noChangeAspect="1"/>
           </p:cNvPicPr>
@@ -19266,7 +19266,7 @@
         <p:spPr>
           <a:xfrm>
             <a:off x="1828800" y="1920240"/>
-            <a:ext cx="3099816" cy="594360"/>
+            <a:ext cx="3587496" cy="789432"/>
           </a:xfrm>
           <a:prstGeom prst="rect">
             <a:avLst/>
@@ -19281,8 +19281,8 @@
         </p:nvSpPr>
         <p:spPr>
           <a:xfrm>
-            <a:off x="5385816" y="1988820"/>
-            <a:ext cx="5998463" cy="502920"/>
+            <a:off x="5873496" y="2086356"/>
+            <a:ext cx="5510783" cy="502920"/>
           </a:xfrm>
           <a:prstGeom prst="rect">
             <a:avLst/>
@@ -19324,7 +19324,7 @@
         </p:blipFill>
         <p:spPr>
           <a:xfrm>
-            <a:off x="1828800" y="2788920"/>
+            <a:off x="1828800" y="2983992"/>
             <a:ext cx="3934968" cy="350520"/>
           </a:xfrm>
           <a:prstGeom prst="rect">
@@ -19340,7 +19340,7 @@
         </p:nvSpPr>
         <p:spPr>
           <a:xfrm>
-            <a:off x="6220968" y="2735580"/>
+            <a:off x="6220968" y="2930652"/>
             <a:ext cx="5163311" cy="502920"/>
           </a:xfrm>
           <a:prstGeom prst="rect">

--- a/a7/packages/A7 Unit 3 - Exponents and Scientific Notation/Slides/A7 3.09  Slides.pptx
+++ b/a7/packages/A7 Unit 3 - Exponents and Scientific Notation/Slides/A7 3.09  Slides.pptx
@@ -4645,7 +4645,7 @@
       </p:sp>
       <p:pic>
         <p:nvPicPr>
-          <p:cNvPr id="9" name="Picture 8" descr="42e61c73ee7164e8.png"/>
+          <p:cNvPr id="9" name="Picture 8" descr="b7530658f265bf95.png"/>
           <p:cNvPicPr>
             <a:picLocks noChangeAspect="1"/>
           </p:cNvPicPr>
@@ -4660,7 +4660,7 @@
         <p:spPr>
           <a:xfrm>
             <a:off x="1828800" y="1920240"/>
-            <a:ext cx="1149096" cy="682752"/>
+            <a:ext cx="1161288" cy="685800"/>
           </a:xfrm>
           <a:prstGeom prst="rect">
             <a:avLst/>
@@ -4675,7 +4675,7 @@
         </p:nvSpPr>
         <p:spPr>
           <a:xfrm>
-            <a:off x="3435096" y="2033016"/>
+            <a:off x="3447288" y="2034540"/>
             <a:ext cx="6400800" cy="502920"/>
           </a:xfrm>
           <a:prstGeom prst="rect">
@@ -4704,7 +4704,7 @@
       </p:sp>
       <p:pic>
         <p:nvPicPr>
-          <p:cNvPr id="11" name="Picture 10" descr="e3fbb572cebb19ea.png"/>
+          <p:cNvPr id="11" name="Picture 10" descr="eccf3b9fe29a56d8.png"/>
           <p:cNvPicPr>
             <a:picLocks noChangeAspect="1"/>
           </p:cNvPicPr>
@@ -4718,8 +4718,8 @@
         </p:blipFill>
         <p:spPr>
           <a:xfrm>
-            <a:off x="1828800" y="2877312"/>
-            <a:ext cx="3718560" cy="810768"/>
+            <a:off x="1828800" y="2880360"/>
+            <a:ext cx="3730752" cy="810768"/>
           </a:xfrm>
           <a:prstGeom prst="rect">
             <a:avLst/>
@@ -4734,8 +4734,8 @@
         </p:nvSpPr>
         <p:spPr>
           <a:xfrm>
-            <a:off x="6004560" y="3054096"/>
-            <a:ext cx="5379720" cy="502920"/>
+            <a:off x="6016752" y="3057144"/>
+            <a:ext cx="5367527" cy="502920"/>
           </a:xfrm>
           <a:prstGeom prst="rect">
             <a:avLst/>
@@ -4763,7 +4763,7 @@
       </p:sp>
       <p:pic>
         <p:nvPicPr>
-          <p:cNvPr id="13" name="Picture 12" descr="27d67e5cd95e2775.png"/>
+          <p:cNvPr id="13" name="Picture 12" descr="b9ef527417c277cf.png"/>
           <p:cNvPicPr>
             <a:picLocks noChangeAspect="1"/>
           </p:cNvPicPr>
@@ -4777,8 +4777,8 @@
         </p:blipFill>
         <p:spPr>
           <a:xfrm>
-            <a:off x="1828800" y="3962399"/>
-            <a:ext cx="2450592" cy="396240"/>
+            <a:off x="1828800" y="3965448"/>
+            <a:ext cx="2450592" cy="399288"/>
           </a:xfrm>
           <a:prstGeom prst="rect">
             <a:avLst/>
@@ -4793,7 +4793,7 @@
         </p:nvSpPr>
         <p:spPr>
           <a:xfrm>
-            <a:off x="4736592" y="3931920"/>
+            <a:off x="4736592" y="3936492"/>
             <a:ext cx="6400800" cy="502920"/>
           </a:xfrm>
           <a:prstGeom prst="rect">
@@ -4828,7 +4828,7 @@
         </p:nvSpPr>
         <p:spPr>
           <a:xfrm>
-            <a:off x="777240" y="4815840"/>
+            <a:off x="777240" y="4821936"/>
             <a:ext cx="10607040" cy="548640"/>
           </a:xfrm>
           <a:prstGeom prst="rect">
@@ -5542,7 +5542,7 @@
         </p:nvSpPr>
         <p:spPr>
           <a:xfrm>
-            <a:off x="1089235" y="2185415"/>
+            <a:off x="1087711" y="2183892"/>
             <a:ext cx="4558064" cy="457200"/>
           </a:xfrm>
           <a:prstGeom prst="rect">
@@ -5571,7 +5571,7 @@
       </p:sp>
       <p:pic>
         <p:nvPicPr>
-          <p:cNvPr id="10" name="Picture 9" descr="496ffc9a205d258d.png"/>
+          <p:cNvPr id="10" name="Picture 9" descr="ff84bfaa36d96a47.png"/>
           <p:cNvPicPr>
             <a:picLocks noChangeAspect="1"/>
           </p:cNvPicPr>
@@ -5585,8 +5585,8 @@
         </p:blipFill>
         <p:spPr>
           <a:xfrm>
-            <a:off x="5510140" y="2196083"/>
-            <a:ext cx="2005584" cy="435864"/>
+            <a:off x="5508616" y="2194560"/>
+            <a:ext cx="2008632" cy="435864"/>
           </a:xfrm>
           <a:prstGeom prst="rect">
             <a:avLst/>
@@ -5601,7 +5601,7 @@
         </p:nvSpPr>
         <p:spPr>
           <a:xfrm>
-            <a:off x="7515724" y="2185415"/>
+            <a:off x="7517248" y="2183892"/>
             <a:ext cx="1356212" cy="457200"/>
           </a:xfrm>
           <a:prstGeom prst="rect">
@@ -5630,7 +5630,7 @@
       </p:sp>
       <p:pic>
         <p:nvPicPr>
-          <p:cNvPr id="12" name="Picture 11" descr="a82e6bba98260e6a.png"/>
+          <p:cNvPr id="12" name="Picture 11" descr="33867c58a31fde99.png"/>
           <p:cNvPicPr>
             <a:picLocks noChangeAspect="1"/>
           </p:cNvPicPr>
@@ -5644,8 +5644,8 @@
         </p:blipFill>
         <p:spPr>
           <a:xfrm>
-            <a:off x="8734776" y="2194560"/>
-            <a:ext cx="2011680" cy="438912"/>
+            <a:off x="8736300" y="2194560"/>
+            <a:ext cx="2011680" cy="435864"/>
           </a:xfrm>
           <a:prstGeom prst="rect">
             <a:avLst/>
@@ -5660,7 +5660,7 @@
         </p:nvSpPr>
         <p:spPr>
           <a:xfrm>
-            <a:off x="10746456" y="2185415"/>
+            <a:off x="10747980" y="2183892"/>
             <a:ext cx="462987" cy="457200"/>
           </a:xfrm>
           <a:prstGeom prst="rect">
@@ -5695,7 +5695,7 @@
         </p:nvSpPr>
         <p:spPr>
           <a:xfrm>
-            <a:off x="777240" y="2953512"/>
+            <a:off x="777240" y="2950464"/>
             <a:ext cx="10607040" cy="429370"/>
           </a:xfrm>
           <a:prstGeom prst="rect">
@@ -6388,7 +6388,7 @@
       </p:sp>
       <p:pic>
         <p:nvPicPr>
-          <p:cNvPr id="9" name="Picture 8" descr="1f36aa11b2dfcf42.png"/>
+          <p:cNvPr id="9" name="Picture 8" descr="1ae3f706710593d3.png"/>
           <p:cNvPicPr>
             <a:picLocks noChangeAspect="1"/>
           </p:cNvPicPr>
@@ -6403,7 +6403,7 @@
         <p:spPr>
           <a:xfrm>
             <a:off x="5643371" y="2103120"/>
-            <a:ext cx="874776" cy="432816"/>
+            <a:ext cx="874776" cy="426720"/>
           </a:xfrm>
           <a:prstGeom prst="rect">
             <a:avLst/>
@@ -6418,7 +6418,7 @@
         </p:nvSpPr>
         <p:spPr>
           <a:xfrm>
-            <a:off x="1828800" y="2810255"/>
+            <a:off x="1828800" y="2804160"/>
             <a:ext cx="8503920" cy="548640"/>
           </a:xfrm>
           <a:prstGeom prst="rect">
@@ -8473,7 +8473,7 @@
       </p:sp>
       <p:pic>
         <p:nvPicPr>
-          <p:cNvPr id="10" name="Picture 9" descr="f7e39139daee107c.png"/>
+          <p:cNvPr id="10" name="Picture 9" descr="60482b8afbb0c2dc.png"/>
           <p:cNvPicPr>
             <a:picLocks noChangeAspect="1"/>
           </p:cNvPicPr>
@@ -8487,8 +8487,8 @@
         </p:blipFill>
         <p:spPr>
           <a:xfrm>
-            <a:off x="4310034" y="2133599"/>
-            <a:ext cx="1618488" cy="350520"/>
+            <a:off x="4310034" y="2132076"/>
+            <a:ext cx="1618488" cy="353568"/>
           </a:xfrm>
           <a:prstGeom prst="rect">
             <a:avLst/>
@@ -11482,7 +11482,7 @@
         </p:nvSpPr>
         <p:spPr>
           <a:xfrm>
-            <a:off x="1797895" y="2080260"/>
+            <a:off x="1794847" y="2080260"/>
             <a:ext cx="4558064" cy="457200"/>
           </a:xfrm>
           <a:prstGeom prst="rect">
@@ -11511,7 +11511,7 @@
       </p:sp>
       <p:pic>
         <p:nvPicPr>
-          <p:cNvPr id="10" name="Picture 9" descr="6343b50271775d7c.png"/>
+          <p:cNvPr id="10" name="Picture 9" descr="b2cf78744edd1205.png"/>
           <p:cNvPicPr>
             <a:picLocks noChangeAspect="1"/>
           </p:cNvPicPr>
@@ -11525,8 +11525,8 @@
         </p:blipFill>
         <p:spPr>
           <a:xfrm>
-            <a:off x="6218800" y="2133599"/>
-            <a:ext cx="1298448" cy="350520"/>
+            <a:off x="6215752" y="2133599"/>
+            <a:ext cx="1301496" cy="350520"/>
           </a:xfrm>
           <a:prstGeom prst="rect">
             <a:avLst/>
@@ -11570,7 +11570,7 @@
       </p:sp>
       <p:pic>
         <p:nvPicPr>
-          <p:cNvPr id="12" name="Picture 11" descr="c3e8fbaa365da3f4.png"/>
+          <p:cNvPr id="12" name="Picture 11" descr="3fbccf964ceba436.png"/>
           <p:cNvPicPr>
             <a:picLocks noChangeAspect="1"/>
           </p:cNvPicPr>
@@ -11585,7 +11585,7 @@
         <p:spPr>
           <a:xfrm>
             <a:off x="8736300" y="2132076"/>
-            <a:ext cx="1301496" cy="353568"/>
+            <a:ext cx="1304544" cy="353568"/>
           </a:xfrm>
           <a:prstGeom prst="rect">
             <a:avLst/>
@@ -11600,7 +11600,7 @@
         </p:nvSpPr>
         <p:spPr>
           <a:xfrm>
-            <a:off x="10037796" y="2080260"/>
+            <a:off x="10040844" y="2080260"/>
             <a:ext cx="462987" cy="457200"/>
           </a:xfrm>
           <a:prstGeom prst="rect">
@@ -12595,7 +12595,7 @@
         </p:nvSpPr>
         <p:spPr>
           <a:xfrm>
-            <a:off x="2400756" y="2080260"/>
+            <a:off x="2399232" y="2080260"/>
             <a:ext cx="3166062" cy="457200"/>
           </a:xfrm>
           <a:prstGeom prst="rect">
@@ -12624,7 +12624,7 @@
       </p:sp>
       <p:pic>
         <p:nvPicPr>
-          <p:cNvPr id="10" name="Picture 9" descr="746391bb3aa38924.png"/>
+          <p:cNvPr id="10" name="Picture 9" descr="62873e535fa7f612.png"/>
           <p:cNvPicPr>
             <a:picLocks noChangeAspect="1"/>
           </p:cNvPicPr>
@@ -12638,8 +12638,8 @@
         </p:blipFill>
         <p:spPr>
           <a:xfrm>
-            <a:off x="5429658" y="2132076"/>
-            <a:ext cx="1600200" cy="353568"/>
+            <a:off x="5428134" y="2132076"/>
+            <a:ext cx="1603248" cy="353568"/>
           </a:xfrm>
           <a:prstGeom prst="rect">
             <a:avLst/>
@@ -12654,7 +12654,7 @@
         </p:nvSpPr>
         <p:spPr>
           <a:xfrm>
-            <a:off x="7029858" y="2080260"/>
+            <a:off x="7031382" y="2080260"/>
             <a:ext cx="929845" cy="457200"/>
           </a:xfrm>
           <a:prstGeom prst="rect">
@@ -12683,7 +12683,7 @@
       </p:sp>
       <p:pic>
         <p:nvPicPr>
-          <p:cNvPr id="12" name="Picture 11" descr="9027aa45f8c131e6.png"/>
+          <p:cNvPr id="12" name="Picture 11" descr="e51f94f16afd58e8.png"/>
           <p:cNvPicPr>
             <a:picLocks noChangeAspect="1"/>
           </p:cNvPicPr>
@@ -12697,7 +12697,7 @@
         </p:blipFill>
         <p:spPr>
           <a:xfrm>
-            <a:off x="7822544" y="2133599"/>
+            <a:off x="7824068" y="2133599"/>
             <a:ext cx="1612392" cy="350520"/>
           </a:xfrm>
           <a:prstGeom prst="rect">
@@ -12713,7 +12713,7 @@
         </p:nvSpPr>
         <p:spPr>
           <a:xfrm>
-            <a:off x="9434936" y="2080260"/>
+            <a:off x="9436460" y="2080260"/>
             <a:ext cx="462987" cy="457200"/>
           </a:xfrm>
           <a:prstGeom prst="rect">
@@ -15145,7 +15145,7 @@
         </p:nvSpPr>
         <p:spPr>
           <a:xfrm>
-            <a:off x="2977665" y="2080260"/>
+            <a:off x="2976141" y="2080260"/>
             <a:ext cx="3062993" cy="457200"/>
           </a:xfrm>
           <a:prstGeom prst="rect">
@@ -15174,7 +15174,7 @@
       </p:sp>
       <p:pic>
         <p:nvPicPr>
-          <p:cNvPr id="10" name="Picture 9" descr="24f5c2a7f64db6c9.png"/>
+          <p:cNvPr id="10" name="Picture 9" descr="8b4c071bf2cc20ee.png"/>
           <p:cNvPicPr>
             <a:picLocks noChangeAspect="1"/>
           </p:cNvPicPr>
@@ -15188,8 +15188,8 @@
         </p:blipFill>
         <p:spPr>
           <a:xfrm>
-            <a:off x="5903499" y="2135124"/>
-            <a:ext cx="1313688" cy="347472"/>
+            <a:off x="5901975" y="2135124"/>
+            <a:ext cx="1316736" cy="347472"/>
           </a:xfrm>
           <a:prstGeom prst="rect">
             <a:avLst/>
@@ -15204,7 +15204,7 @@
         </p:nvSpPr>
         <p:spPr>
           <a:xfrm>
-            <a:off x="7217187" y="2080260"/>
+            <a:off x="7218711" y="2080260"/>
             <a:ext cx="2103826" cy="457200"/>
           </a:xfrm>
           <a:prstGeom prst="rect">
@@ -15239,7 +15239,7 @@
         </p:nvSpPr>
         <p:spPr>
           <a:xfrm>
-            <a:off x="2979189" y="2766060"/>
+            <a:off x="2977665" y="2766060"/>
             <a:ext cx="3062993" cy="457200"/>
           </a:xfrm>
           <a:prstGeom prst="rect">
@@ -15268,7 +15268,7 @@
       </p:sp>
       <p:pic>
         <p:nvPicPr>
-          <p:cNvPr id="13" name="Picture 12" descr="66c17032647eb85b.png"/>
+          <p:cNvPr id="13" name="Picture 12" descr="5966f77beb213b32.png"/>
           <p:cNvPicPr>
             <a:picLocks noChangeAspect="1"/>
           </p:cNvPicPr>
@@ -15282,8 +15282,8 @@
         </p:blipFill>
         <p:spPr>
           <a:xfrm>
-            <a:off x="5905023" y="2820924"/>
-            <a:ext cx="1310640" cy="347472"/>
+            <a:off x="5903499" y="2820924"/>
+            <a:ext cx="1313688" cy="347472"/>
           </a:xfrm>
           <a:prstGeom prst="rect">
             <a:avLst/>
@@ -15298,7 +15298,7 @@
         </p:nvSpPr>
         <p:spPr>
           <a:xfrm>
-            <a:off x="7215663" y="2766060"/>
+            <a:off x="7217187" y="2766060"/>
             <a:ext cx="2103826" cy="457200"/>
           </a:xfrm>
           <a:prstGeom prst="rect">
@@ -17521,7 +17521,7 @@
       </p:graphicFrame>
       <p:pic>
         <p:nvPicPr>
-          <p:cNvPr id="12" name="Picture 11" descr="655d8151b1ce1ed1.png"/>
+          <p:cNvPr id="12" name="Picture 11" descr="d6ecddef6320cd16.png"/>
           <p:cNvPicPr>
             <a:picLocks noChangeAspect="1"/>
           </p:cNvPicPr>
@@ -17535,8 +17535,8 @@
         </p:blipFill>
         <p:spPr>
           <a:xfrm>
-            <a:off x="3032496" y="3363468"/>
-            <a:ext cx="1697736" cy="679704"/>
+            <a:off x="3029448" y="3363468"/>
+            <a:ext cx="1700784" cy="682752"/>
           </a:xfrm>
           <a:prstGeom prst="rect">
             <a:avLst/>
@@ -17551,7 +17551,7 @@
         </p:nvSpPr>
         <p:spPr>
           <a:xfrm>
-            <a:off x="4730232" y="3474720"/>
+            <a:off x="4730232" y="3476244"/>
             <a:ext cx="1183151" cy="457200"/>
           </a:xfrm>
           <a:prstGeom prst="rect">
@@ -17580,7 +17580,7 @@
       </p:sp>
       <p:pic>
         <p:nvPicPr>
-          <p:cNvPr id="14" name="Picture 13" descr="fbb93d80bc2542b2.png"/>
+          <p:cNvPr id="14" name="Picture 13" descr="96b31b16b9344bf7.png"/>
           <p:cNvPicPr>
             <a:picLocks noChangeAspect="1"/>
           </p:cNvPicPr>
@@ -17595,7 +17595,7 @@
         <p:spPr>
           <a:xfrm>
             <a:off x="5776223" y="3337560"/>
-            <a:ext cx="3352800" cy="731520"/>
+            <a:ext cx="3355848" cy="734568"/>
           </a:xfrm>
           <a:prstGeom prst="rect">
             <a:avLst/>
@@ -17610,7 +17610,7 @@
         </p:nvSpPr>
         <p:spPr>
           <a:xfrm>
-            <a:off x="987552" y="4407408"/>
+            <a:off x="987552" y="4410456"/>
             <a:ext cx="10131551" cy="950976"/>
           </a:xfrm>
           <a:prstGeom prst="rect">
@@ -17955,7 +17955,7 @@
       </p:cxnSp>
       <p:pic>
         <p:nvPicPr>
-          <p:cNvPr id="10" name="Picture 9" descr="13dcfc288503f7a4.png"/>
+          <p:cNvPr id="10" name="Picture 9" descr="e3fded137bde5d84.png"/>
           <p:cNvPicPr>
             <a:picLocks noChangeAspect="1"/>
           </p:cNvPicPr>
@@ -17969,8 +17969,8 @@
         </p:blipFill>
         <p:spPr>
           <a:xfrm>
-            <a:off x="1974840" y="2369820"/>
-            <a:ext cx="3230880" cy="353568"/>
+            <a:off x="1974840" y="2368296"/>
+            <a:ext cx="3230880" cy="356616"/>
           </a:xfrm>
           <a:prstGeom prst="rect">
             <a:avLst/>
@@ -18014,7 +18014,7 @@
       </p:sp>
       <p:pic>
         <p:nvPicPr>
-          <p:cNvPr id="12" name="Picture 11" descr="97b3fe6dab4e4a48.png"/>
+          <p:cNvPr id="12" name="Picture 11" descr="70fccb69fb979442.png"/>
           <p:cNvPicPr>
             <a:picLocks noChangeAspect="1"/>
           </p:cNvPicPr>
@@ -18038,7 +18038,7 @@
       </p:pic>
       <p:pic>
         <p:nvPicPr>
-          <p:cNvPr id="13" name="Picture 12" descr="370daac2f9fe772b.png"/>
+          <p:cNvPr id="13" name="Picture 12" descr="3d3d81b8cf9d78c9.png"/>
           <p:cNvPicPr>
             <a:picLocks noChangeAspect="1"/>
           </p:cNvPicPr>
@@ -18448,7 +18448,7 @@
       </p:cxnSp>
       <p:pic>
         <p:nvPicPr>
-          <p:cNvPr id="10" name="Picture 9" descr="7e65c605f1bd926f.png"/>
+          <p:cNvPr id="10" name="Picture 9" descr="40fa18e698f1b952.png"/>
           <p:cNvPicPr>
             <a:picLocks noChangeAspect="1"/>
           </p:cNvPicPr>
@@ -18462,8 +18462,8 @@
         </p:blipFill>
         <p:spPr>
           <a:xfrm>
-            <a:off x="2037324" y="2342388"/>
-            <a:ext cx="4553712" cy="822960"/>
+            <a:off x="2025132" y="2340864"/>
+            <a:ext cx="4565904" cy="822960"/>
           </a:xfrm>
           <a:prstGeom prst="rect">
             <a:avLst/>
@@ -18478,7 +18478,7 @@
         </p:nvSpPr>
         <p:spPr>
           <a:xfrm>
-            <a:off x="6591036" y="2525268"/>
+            <a:off x="6591036" y="2523744"/>
             <a:ext cx="1183151" cy="457200"/>
           </a:xfrm>
           <a:prstGeom prst="rect">
@@ -18507,7 +18507,7 @@
       </p:sp>
       <p:pic>
         <p:nvPicPr>
-          <p:cNvPr id="12" name="Picture 11" descr="a0ca7da1486902b7.png"/>
+          <p:cNvPr id="12" name="Picture 11" descr="302afd80ef14e650.png"/>
           <p:cNvPicPr>
             <a:picLocks noChangeAspect="1"/>
           </p:cNvPicPr>
@@ -18522,7 +18522,7 @@
         <p:spPr>
           <a:xfrm>
             <a:off x="7637027" y="2340864"/>
-            <a:ext cx="2487168" cy="826008"/>
+            <a:ext cx="2499360" cy="822960"/>
           </a:xfrm>
           <a:prstGeom prst="rect">
             <a:avLst/>
@@ -18537,7 +18537,7 @@
         </p:nvSpPr>
         <p:spPr>
           <a:xfrm>
-            <a:off x="987552" y="3505199"/>
+            <a:off x="987552" y="3502151"/>
             <a:ext cx="10131551" cy="950976"/>
           </a:xfrm>
           <a:prstGeom prst="rect">
@@ -18572,7 +18572,7 @@
         </p:nvSpPr>
         <p:spPr>
           <a:xfrm>
-            <a:off x="987552" y="4712208"/>
+            <a:off x="987552" y="4709160"/>
             <a:ext cx="10131551" cy="950976"/>
           </a:xfrm>
           <a:prstGeom prst="rect">
@@ -19251,7 +19251,7 @@
       </p:sp>
       <p:pic>
         <p:nvPicPr>
-          <p:cNvPr id="9" name="Picture 8" descr="98ef0913c0fc6250.png"/>
+          <p:cNvPr id="9" name="Picture 8" descr="f75d1e7d21172637.png"/>
           <p:cNvPicPr>
             <a:picLocks noChangeAspect="1"/>
           </p:cNvPicPr>
@@ -19266,7 +19266,7 @@
         <p:spPr>
           <a:xfrm>
             <a:off x="1828800" y="1920240"/>
-            <a:ext cx="3587496" cy="789432"/>
+            <a:ext cx="3599688" cy="792480"/>
           </a:xfrm>
           <a:prstGeom prst="rect">
             <a:avLst/>
@@ -19281,8 +19281,8 @@
         </p:nvSpPr>
         <p:spPr>
           <a:xfrm>
-            <a:off x="5873496" y="2086356"/>
-            <a:ext cx="5510783" cy="502920"/>
+            <a:off x="5885688" y="2087880"/>
+            <a:ext cx="5498591" cy="502920"/>
           </a:xfrm>
           <a:prstGeom prst="rect">
             <a:avLst/>
@@ -19310,7 +19310,7 @@
       </p:sp>
       <p:pic>
         <p:nvPicPr>
-          <p:cNvPr id="11" name="Picture 10" descr="c34df051b1925e51.png"/>
+          <p:cNvPr id="11" name="Picture 10" descr="0cf3cd97d6d483b9.png"/>
           <p:cNvPicPr>
             <a:picLocks noChangeAspect="1"/>
           </p:cNvPicPr>
@@ -19324,7 +19324,7 @@
         </p:blipFill>
         <p:spPr>
           <a:xfrm>
-            <a:off x="1828800" y="2983992"/>
+            <a:off x="1828800" y="2987040"/>
             <a:ext cx="3934968" cy="350520"/>
           </a:xfrm>
           <a:prstGeom prst="rect">
@@ -19340,7 +19340,7 @@
         </p:nvSpPr>
         <p:spPr>
           <a:xfrm>
-            <a:off x="6220968" y="2930652"/>
+            <a:off x="6220968" y="2933700"/>
             <a:ext cx="5163311" cy="502920"/>
           </a:xfrm>
           <a:prstGeom prst="rect">

--- a/a7/packages/A7 Unit 3 - Exponents and Scientific Notation/Slides/A7 3.09  Slides.pptx
+++ b/a7/packages/A7 Unit 3 - Exponents and Scientific Notation/Slides/A7 3.09  Slides.pptx
@@ -4645,7 +4645,7 @@
       </p:sp>
       <p:pic>
         <p:nvPicPr>
-          <p:cNvPr id="9" name="Picture 8" descr="b7530658f265bf95.png"/>
+          <p:cNvPr id="9" name="Picture 8" descr="59c7818cbaac33bd.png"/>
           <p:cNvPicPr>
             <a:picLocks noChangeAspect="1"/>
           </p:cNvPicPr>
@@ -4660,7 +4660,7 @@
         <p:spPr>
           <a:xfrm>
             <a:off x="1828800" y="1920240"/>
-            <a:ext cx="1161288" cy="685800"/>
+            <a:ext cx="1152144" cy="685800"/>
           </a:xfrm>
           <a:prstGeom prst="rect">
             <a:avLst/>
@@ -4675,7 +4675,7 @@
         </p:nvSpPr>
         <p:spPr>
           <a:xfrm>
-            <a:off x="3447288" y="2034540"/>
+            <a:off x="3438144" y="2034540"/>
             <a:ext cx="6400800" cy="502920"/>
           </a:xfrm>
           <a:prstGeom prst="rect">
@@ -4704,7 +4704,7 @@
       </p:sp>
       <p:pic>
         <p:nvPicPr>
-          <p:cNvPr id="11" name="Picture 10" descr="eccf3b9fe29a56d8.png"/>
+          <p:cNvPr id="11" name="Picture 10" descr="6b497f46afc4e7f7.png"/>
           <p:cNvPicPr>
             <a:picLocks noChangeAspect="1"/>
           </p:cNvPicPr>
@@ -4719,7 +4719,7 @@
         <p:spPr>
           <a:xfrm>
             <a:off x="1828800" y="2880360"/>
-            <a:ext cx="3730752" cy="810768"/>
+            <a:ext cx="3721608" cy="810768"/>
           </a:xfrm>
           <a:prstGeom prst="rect">
             <a:avLst/>
@@ -4734,8 +4734,8 @@
         </p:nvSpPr>
         <p:spPr>
           <a:xfrm>
-            <a:off x="6016752" y="3057144"/>
-            <a:ext cx="5367527" cy="502920"/>
+            <a:off x="6007608" y="3057144"/>
+            <a:ext cx="5376671" cy="502920"/>
           </a:xfrm>
           <a:prstGeom prst="rect">
             <a:avLst/>
@@ -4763,7 +4763,7 @@
       </p:sp>
       <p:pic>
         <p:nvPicPr>
-          <p:cNvPr id="13" name="Picture 12" descr="b9ef527417c277cf.png"/>
+          <p:cNvPr id="13" name="Picture 12" descr="60571d6036a338ff.png"/>
           <p:cNvPicPr>
             <a:picLocks noChangeAspect="1"/>
           </p:cNvPicPr>
@@ -5571,7 +5571,7 @@
       </p:sp>
       <p:pic>
         <p:nvPicPr>
-          <p:cNvPr id="10" name="Picture 9" descr="ff84bfaa36d96a47.png"/>
+          <p:cNvPr id="10" name="Picture 9" descr="2496b86a47380327.png"/>
           <p:cNvPicPr>
             <a:picLocks noChangeAspect="1"/>
           </p:cNvPicPr>
@@ -5630,7 +5630,7 @@
       </p:sp>
       <p:pic>
         <p:nvPicPr>
-          <p:cNvPr id="12" name="Picture 11" descr="33867c58a31fde99.png"/>
+          <p:cNvPr id="12" name="Picture 11" descr="8ceadc8177621752.png"/>
           <p:cNvPicPr>
             <a:picLocks noChangeAspect="1"/>
           </p:cNvPicPr>
@@ -6388,7 +6388,7 @@
       </p:sp>
       <p:pic>
         <p:nvPicPr>
-          <p:cNvPr id="9" name="Picture 8" descr="1ae3f706710593d3.png"/>
+          <p:cNvPr id="9" name="Picture 8" descr="043ff5c9055650f5.png"/>
           <p:cNvPicPr>
             <a:picLocks noChangeAspect="1"/>
           </p:cNvPicPr>
@@ -8473,7 +8473,7 @@
       </p:sp>
       <p:pic>
         <p:nvPicPr>
-          <p:cNvPr id="10" name="Picture 9" descr="60482b8afbb0c2dc.png"/>
+          <p:cNvPr id="10" name="Picture 9" descr="533d0b83fdac28f7.png"/>
           <p:cNvPicPr>
             <a:picLocks noChangeAspect="1"/>
           </p:cNvPicPr>
@@ -11482,7 +11482,7 @@
         </p:nvSpPr>
         <p:spPr>
           <a:xfrm>
-            <a:off x="1794847" y="2080260"/>
+            <a:off x="1793323" y="2080260"/>
             <a:ext cx="4558064" cy="457200"/>
           </a:xfrm>
           <a:prstGeom prst="rect">
@@ -11511,7 +11511,7 @@
       </p:sp>
       <p:pic>
         <p:nvPicPr>
-          <p:cNvPr id="10" name="Picture 9" descr="b2cf78744edd1205.png"/>
+          <p:cNvPr id="10" name="Picture 9" descr="e98b31f32f5b097f.png"/>
           <p:cNvPicPr>
             <a:picLocks noChangeAspect="1"/>
           </p:cNvPicPr>
@@ -11525,8 +11525,8 @@
         </p:blipFill>
         <p:spPr>
           <a:xfrm>
-            <a:off x="6215752" y="2133599"/>
-            <a:ext cx="1301496" cy="350520"/>
+            <a:off x="6214228" y="2133599"/>
+            <a:ext cx="1304544" cy="350520"/>
           </a:xfrm>
           <a:prstGeom prst="rect">
             <a:avLst/>
@@ -11541,7 +11541,7 @@
         </p:nvSpPr>
         <p:spPr>
           <a:xfrm>
-            <a:off x="7517248" y="2080260"/>
+            <a:off x="7518772" y="2080260"/>
             <a:ext cx="1356212" cy="457200"/>
           </a:xfrm>
           <a:prstGeom prst="rect">
@@ -11570,7 +11570,7 @@
       </p:sp>
       <p:pic>
         <p:nvPicPr>
-          <p:cNvPr id="12" name="Picture 11" descr="3fbccf964ceba436.png"/>
+          <p:cNvPr id="12" name="Picture 11" descr="ccaef7e81c68392e.png"/>
           <p:cNvPicPr>
             <a:picLocks noChangeAspect="1"/>
           </p:cNvPicPr>
@@ -11584,7 +11584,7 @@
         </p:blipFill>
         <p:spPr>
           <a:xfrm>
-            <a:off x="8736300" y="2132076"/>
+            <a:off x="8737824" y="2132076"/>
             <a:ext cx="1304544" cy="353568"/>
           </a:xfrm>
           <a:prstGeom prst="rect">
@@ -11600,7 +11600,7 @@
         </p:nvSpPr>
         <p:spPr>
           <a:xfrm>
-            <a:off x="10040844" y="2080260"/>
+            <a:off x="10042368" y="2080260"/>
             <a:ext cx="462987" cy="457200"/>
           </a:xfrm>
           <a:prstGeom prst="rect">
@@ -12595,7 +12595,7 @@
         </p:nvSpPr>
         <p:spPr>
           <a:xfrm>
-            <a:off x="2399232" y="2080260"/>
+            <a:off x="2397708" y="2080260"/>
             <a:ext cx="3166062" cy="457200"/>
           </a:xfrm>
           <a:prstGeom prst="rect">
@@ -12624,7 +12624,7 @@
       </p:sp>
       <p:pic>
         <p:nvPicPr>
-          <p:cNvPr id="10" name="Picture 9" descr="62873e535fa7f612.png"/>
+          <p:cNvPr id="10" name="Picture 9" descr="df917c83e179d439.png"/>
           <p:cNvPicPr>
             <a:picLocks noChangeAspect="1"/>
           </p:cNvPicPr>
@@ -12638,8 +12638,8 @@
         </p:blipFill>
         <p:spPr>
           <a:xfrm>
-            <a:off x="5428134" y="2132076"/>
-            <a:ext cx="1603248" cy="353568"/>
+            <a:off x="5426610" y="2132076"/>
+            <a:ext cx="1606296" cy="353568"/>
           </a:xfrm>
           <a:prstGeom prst="rect">
             <a:avLst/>
@@ -12654,7 +12654,7 @@
         </p:nvSpPr>
         <p:spPr>
           <a:xfrm>
-            <a:off x="7031382" y="2080260"/>
+            <a:off x="7032906" y="2080260"/>
             <a:ext cx="929845" cy="457200"/>
           </a:xfrm>
           <a:prstGeom prst="rect">
@@ -12683,7 +12683,7 @@
       </p:sp>
       <p:pic>
         <p:nvPicPr>
-          <p:cNvPr id="12" name="Picture 11" descr="e51f94f16afd58e8.png"/>
+          <p:cNvPr id="12" name="Picture 11" descr="1a294302f9ade9e4.png"/>
           <p:cNvPicPr>
             <a:picLocks noChangeAspect="1"/>
           </p:cNvPicPr>
@@ -12697,7 +12697,7 @@
         </p:blipFill>
         <p:spPr>
           <a:xfrm>
-            <a:off x="7824068" y="2133599"/>
+            <a:off x="7825592" y="2133599"/>
             <a:ext cx="1612392" cy="350520"/>
           </a:xfrm>
           <a:prstGeom prst="rect">
@@ -12713,7 +12713,7 @@
         </p:nvSpPr>
         <p:spPr>
           <a:xfrm>
-            <a:off x="9436460" y="2080260"/>
+            <a:off x="9437984" y="2080260"/>
             <a:ext cx="462987" cy="457200"/>
           </a:xfrm>
           <a:prstGeom prst="rect">
@@ -15174,7 +15174,7 @@
       </p:sp>
       <p:pic>
         <p:nvPicPr>
-          <p:cNvPr id="10" name="Picture 9" descr="8b4c071bf2cc20ee.png"/>
+          <p:cNvPr id="10" name="Picture 9" descr="77a4d57c92c152c2.png"/>
           <p:cNvPicPr>
             <a:picLocks noChangeAspect="1"/>
           </p:cNvPicPr>
@@ -15239,7 +15239,7 @@
         </p:nvSpPr>
         <p:spPr>
           <a:xfrm>
-            <a:off x="2977665" y="2766060"/>
+            <a:off x="2976141" y="2766060"/>
             <a:ext cx="3062993" cy="457200"/>
           </a:xfrm>
           <a:prstGeom prst="rect">
@@ -15268,7 +15268,7 @@
       </p:sp>
       <p:pic>
         <p:nvPicPr>
-          <p:cNvPr id="13" name="Picture 12" descr="5966f77beb213b32.png"/>
+          <p:cNvPr id="13" name="Picture 12" descr="ecebfbd77cf00b59.png"/>
           <p:cNvPicPr>
             <a:picLocks noChangeAspect="1"/>
           </p:cNvPicPr>
@@ -15282,8 +15282,8 @@
         </p:blipFill>
         <p:spPr>
           <a:xfrm>
-            <a:off x="5903499" y="2820924"/>
-            <a:ext cx="1313688" cy="347472"/>
+            <a:off x="5901975" y="2820924"/>
+            <a:ext cx="1316736" cy="347472"/>
           </a:xfrm>
           <a:prstGeom prst="rect">
             <a:avLst/>
@@ -15298,7 +15298,7 @@
         </p:nvSpPr>
         <p:spPr>
           <a:xfrm>
-            <a:off x="7217187" y="2766060"/>
+            <a:off x="7218711" y="2766060"/>
             <a:ext cx="2103826" cy="457200"/>
           </a:xfrm>
           <a:prstGeom prst="rect">
@@ -17521,7 +17521,7 @@
       </p:graphicFrame>
       <p:pic>
         <p:nvPicPr>
-          <p:cNvPr id="12" name="Picture 11" descr="d6ecddef6320cd16.png"/>
+          <p:cNvPr id="12" name="Picture 11" descr="87b97c2695b4b35d.png"/>
           <p:cNvPicPr>
             <a:picLocks noChangeAspect="1"/>
           </p:cNvPicPr>
@@ -17535,8 +17535,8 @@
         </p:blipFill>
         <p:spPr>
           <a:xfrm>
-            <a:off x="3029448" y="3363468"/>
-            <a:ext cx="1700784" cy="682752"/>
+            <a:off x="3034020" y="3364991"/>
+            <a:ext cx="1691640" cy="679704"/>
           </a:xfrm>
           <a:prstGeom prst="rect">
             <a:avLst/>
@@ -17551,7 +17551,7 @@
         </p:nvSpPr>
         <p:spPr>
           <a:xfrm>
-            <a:off x="4730232" y="3476244"/>
+            <a:off x="4725660" y="3476244"/>
             <a:ext cx="1183151" cy="457200"/>
           </a:xfrm>
           <a:prstGeom prst="rect">
@@ -17580,7 +17580,7 @@
       </p:sp>
       <p:pic>
         <p:nvPicPr>
-          <p:cNvPr id="14" name="Picture 13" descr="96b31b16b9344bf7.png"/>
+          <p:cNvPr id="14" name="Picture 13" descr="9756d439c25d70ac.png"/>
           <p:cNvPicPr>
             <a:picLocks noChangeAspect="1"/>
           </p:cNvPicPr>
@@ -17594,7 +17594,7 @@
         </p:blipFill>
         <p:spPr>
           <a:xfrm>
-            <a:off x="5776223" y="3337560"/>
+            <a:off x="5771651" y="3337560"/>
             <a:ext cx="3355848" cy="734568"/>
           </a:xfrm>
           <a:prstGeom prst="rect">
@@ -17955,7 +17955,7 @@
       </p:cxnSp>
       <p:pic>
         <p:nvPicPr>
-          <p:cNvPr id="10" name="Picture 9" descr="e3fded137bde5d84.png"/>
+          <p:cNvPr id="10" name="Picture 9" descr="7b164213b9232e38.png"/>
           <p:cNvPicPr>
             <a:picLocks noChangeAspect="1"/>
           </p:cNvPicPr>
@@ -17969,8 +17969,8 @@
         </p:blipFill>
         <p:spPr>
           <a:xfrm>
-            <a:off x="1974840" y="2368296"/>
-            <a:ext cx="3230880" cy="356616"/>
+            <a:off x="1971792" y="2369820"/>
+            <a:ext cx="3233928" cy="353568"/>
           </a:xfrm>
           <a:prstGeom prst="rect">
             <a:avLst/>
@@ -18014,7 +18014,7 @@
       </p:sp>
       <p:pic>
         <p:nvPicPr>
-          <p:cNvPr id="12" name="Picture 11" descr="70fccb69fb979442.png"/>
+          <p:cNvPr id="12" name="Picture 11" descr="a5d136b823d619f9.png"/>
           <p:cNvPicPr>
             <a:picLocks noChangeAspect="1"/>
           </p:cNvPicPr>
@@ -18029,7 +18029,7 @@
         <p:spPr>
           <a:xfrm>
             <a:off x="6251711" y="2369820"/>
-            <a:ext cx="3934968" cy="353568"/>
+            <a:ext cx="3938016" cy="353568"/>
           </a:xfrm>
           <a:prstGeom prst="rect">
             <a:avLst/>
@@ -18038,7 +18038,7 @@
       </p:pic>
       <p:pic>
         <p:nvPicPr>
-          <p:cNvPr id="13" name="Picture 12" descr="3d3d81b8cf9d78c9.png"/>
+          <p:cNvPr id="13" name="Picture 12" descr="40f6cd0eb0ebc885.png"/>
           <p:cNvPicPr>
             <a:picLocks noChangeAspect="1"/>
           </p:cNvPicPr>
@@ -18052,8 +18052,8 @@
         </p:blipFill>
         <p:spPr>
           <a:xfrm>
-            <a:off x="3899915" y="3058668"/>
-            <a:ext cx="4361688" cy="347472"/>
+            <a:off x="3898391" y="3058668"/>
+            <a:ext cx="4364736" cy="347472"/>
           </a:xfrm>
           <a:prstGeom prst="rect">
             <a:avLst/>
@@ -18448,7 +18448,7 @@
       </p:cxnSp>
       <p:pic>
         <p:nvPicPr>
-          <p:cNvPr id="10" name="Picture 9" descr="40fa18e698f1b952.png"/>
+          <p:cNvPr id="10" name="Picture 9" descr="1960a542aafe9c29.png"/>
           <p:cNvPicPr>
             <a:picLocks noChangeAspect="1"/>
           </p:cNvPicPr>
@@ -18462,8 +18462,8 @@
         </p:blipFill>
         <p:spPr>
           <a:xfrm>
-            <a:off x="2025132" y="2340864"/>
-            <a:ext cx="4565904" cy="822960"/>
+            <a:off x="2034276" y="2340864"/>
+            <a:ext cx="4556760" cy="822960"/>
           </a:xfrm>
           <a:prstGeom prst="rect">
             <a:avLst/>
@@ -18507,7 +18507,7 @@
       </p:sp>
       <p:pic>
         <p:nvPicPr>
-          <p:cNvPr id="12" name="Picture 11" descr="302afd80ef14e650.png"/>
+          <p:cNvPr id="12" name="Picture 11" descr="a13ef6adfb19a516.png"/>
           <p:cNvPicPr>
             <a:picLocks noChangeAspect="1"/>
           </p:cNvPicPr>
@@ -18522,7 +18522,7 @@
         <p:spPr>
           <a:xfrm>
             <a:off x="7637027" y="2340864"/>
-            <a:ext cx="2499360" cy="822960"/>
+            <a:ext cx="2490216" cy="822960"/>
           </a:xfrm>
           <a:prstGeom prst="rect">
             <a:avLst/>
@@ -19251,7 +19251,7 @@
       </p:sp>
       <p:pic>
         <p:nvPicPr>
-          <p:cNvPr id="9" name="Picture 8" descr="f75d1e7d21172637.png"/>
+          <p:cNvPr id="9" name="Picture 8" descr="3795759730f8e373.png"/>
           <p:cNvPicPr>
             <a:picLocks noChangeAspect="1"/>
           </p:cNvPicPr>
@@ -19266,7 +19266,7 @@
         <p:spPr>
           <a:xfrm>
             <a:off x="1828800" y="1920240"/>
-            <a:ext cx="3599688" cy="792480"/>
+            <a:ext cx="3590544" cy="792480"/>
           </a:xfrm>
           <a:prstGeom prst="rect">
             <a:avLst/>
@@ -19281,8 +19281,8 @@
         </p:nvSpPr>
         <p:spPr>
           <a:xfrm>
-            <a:off x="5885688" y="2087880"/>
-            <a:ext cx="5498591" cy="502920"/>
+            <a:off x="5876544" y="2087880"/>
+            <a:ext cx="5507735" cy="502920"/>
           </a:xfrm>
           <a:prstGeom prst="rect">
             <a:avLst/>
@@ -19310,7 +19310,7 @@
       </p:sp>
       <p:pic>
         <p:nvPicPr>
-          <p:cNvPr id="11" name="Picture 10" descr="0cf3cd97d6d483b9.png"/>
+          <p:cNvPr id="11" name="Picture 10" descr="e86600eaee99cccb.png"/>
           <p:cNvPicPr>
             <a:picLocks noChangeAspect="1"/>
           </p:cNvPicPr>
@@ -19325,7 +19325,7 @@
         <p:spPr>
           <a:xfrm>
             <a:off x="1828800" y="2987040"/>
-            <a:ext cx="3934968" cy="350520"/>
+            <a:ext cx="3938016" cy="350520"/>
           </a:xfrm>
           <a:prstGeom prst="rect">
             <a:avLst/>
@@ -19340,8 +19340,8 @@
         </p:nvSpPr>
         <p:spPr>
           <a:xfrm>
-            <a:off x="6220968" y="2933700"/>
-            <a:ext cx="5163311" cy="502920"/>
+            <a:off x="6224016" y="2933700"/>
+            <a:ext cx="5160263" cy="502920"/>
           </a:xfrm>
           <a:prstGeom prst="rect">
             <a:avLst/>

--- a/a7/packages/A7 Unit 3 - Exponents and Scientific Notation/Slides/A7 3.09  Slides.pptx
+++ b/a7/packages/A7 Unit 3 - Exponents and Scientific Notation/Slides/A7 3.09  Slides.pptx
@@ -9831,7 +9831,7 @@
                 </a:solidFill>
                 <a:latin typeface="Century Schoolbook"/>
               </a:rPr>
-              <a:t>-4</a:t>
+              <a:t>-3</a:t>
             </a:r>
           </a:p>
         </p:txBody>
@@ -9884,7 +9884,7 @@
                 </a:solidFill>
                 <a:latin typeface="Century Schoolbook"/>
               </a:rPr>
-              <a:t>-3</a:t>
+              <a:t>4</a:t>
             </a:r>
           </a:p>
         </p:txBody>
@@ -9990,7 +9990,7 @@
                 </a:solidFill>
                 <a:latin typeface="Century Schoolbook"/>
               </a:rPr>
-              <a:t>4</a:t>
+              <a:t>-4</a:t>
             </a:r>
           </a:p>
         </p:txBody>
@@ -10354,29 +10354,29 @@
             <a:r>
               <a:rPr sz="2400" b="1" i="0">
                 <a:solidFill>
-                  <a:srgbClr val="9E1B32"/>
+                  <a:srgbClr val="1A1A1A"/>
                 </a:solidFill>
                 <a:latin typeface="Century Schoolbook"/>
               </a:rPr>
               <a:t>A.   </a:t>
             </a:r>
             <a:r>
-              <a:rPr sz="2400" b="1" i="0">
-                <a:solidFill>
-                  <a:srgbClr val="9E1B32"/>
+              <a:rPr sz="2400" b="0" i="0">
+                <a:solidFill>
+                  <a:srgbClr val="1A1A1A"/>
                 </a:solidFill>
                 <a:latin typeface="Century Schoolbook"/>
               </a:rPr>
               <a:t>8.1 × 10</a:t>
             </a:r>
             <a:r>
-              <a:rPr sz="2400" b="1" i="0" baseline="30000">
-                <a:solidFill>
-                  <a:srgbClr val="9E1B32"/>
-                </a:solidFill>
-                <a:latin typeface="Century Schoolbook"/>
-              </a:rPr>
-              <a:t>-4</a:t>
+              <a:rPr sz="2400" b="0" i="0" baseline="30000">
+                <a:solidFill>
+                  <a:srgbClr val="1A1A1A"/>
+                </a:solidFill>
+                <a:latin typeface="Century Schoolbook"/>
+              </a:rPr>
+              <a:t>-3</a:t>
             </a:r>
           </a:p>
         </p:txBody>
@@ -10429,7 +10429,7 @@
                 </a:solidFill>
                 <a:latin typeface="Century Schoolbook"/>
               </a:rPr>
-              <a:t>-3</a:t>
+              <a:t>4</a:t>
             </a:r>
           </a:p>
         </p:txBody>
@@ -10513,29 +10513,29 @@
             <a:r>
               <a:rPr sz="2400" b="1" i="0">
                 <a:solidFill>
-                  <a:srgbClr val="1A1A1A"/>
+                  <a:srgbClr val="9E1B32"/>
                 </a:solidFill>
                 <a:latin typeface="Century Schoolbook"/>
               </a:rPr>
               <a:t>D.   </a:t>
             </a:r>
             <a:r>
-              <a:rPr sz="2400" b="0" i="0">
-                <a:solidFill>
-                  <a:srgbClr val="1A1A1A"/>
+              <a:rPr sz="2400" b="1" i="0">
+                <a:solidFill>
+                  <a:srgbClr val="9E1B32"/>
                 </a:solidFill>
                 <a:latin typeface="Century Schoolbook"/>
               </a:rPr>
               <a:t>8.1 × 10</a:t>
             </a:r>
             <a:r>
-              <a:rPr sz="2400" b="0" i="0" baseline="30000">
-                <a:solidFill>
-                  <a:srgbClr val="1A1A1A"/>
-                </a:solidFill>
-                <a:latin typeface="Century Schoolbook"/>
-              </a:rPr>
-              <a:t>4</a:t>
+              <a:rPr sz="2400" b="1" i="0" baseline="30000">
+                <a:solidFill>
+                  <a:srgbClr val="9E1B32"/>
+                </a:solidFill>
+                <a:latin typeface="Century Schoolbook"/>
+              </a:rPr>
+              <a:t>-4</a:t>
             </a:r>
           </a:p>
         </p:txBody>
@@ -10570,7 +10570,7 @@
                 </a:solidFill>
                 <a:latin typeface="Century Schoolbook"/>
               </a:rPr>
-              <a:t>Answer:   A — 8.1 × 10</a:t>
+              <a:t>Answer:   D — 8.1 × 10</a:t>
             </a:r>
             <a:r>
               <a:rPr sz="3200" b="1" i="0" baseline="30000">
@@ -11083,7 +11083,7 @@
                 </a:solidFill>
                 <a:latin typeface="Century Schoolbook"/>
               </a:rPr>
-              <a:t>3</a:t>
+              <a:t>30</a:t>
             </a:r>
           </a:p>
         </p:txBody>
@@ -11127,7 +11127,7 @@
                 </a:solidFill>
                 <a:latin typeface="Century Schoolbook"/>
               </a:rPr>
-              <a:t>30</a:t>
+              <a:t>3</a:t>
             </a:r>
           </a:p>
         </p:txBody>
@@ -11710,7 +11710,7 @@
                 </a:solidFill>
                 <a:latin typeface="Century Schoolbook"/>
               </a:rPr>
-              <a:t>3</a:t>
+              <a:t>30</a:t>
             </a:r>
           </a:p>
         </p:txBody>
@@ -11754,7 +11754,7 @@
                 </a:solidFill>
                 <a:latin typeface="Century Schoolbook"/>
               </a:rPr>
-              <a:t>30</a:t>
+              <a:t>3</a:t>
             </a:r>
           </a:p>
         </p:txBody>

--- a/a7/packages/A7 Unit 3 - Exponents and Scientific Notation/Slides/A7 3.09  Slides.pptx
+++ b/a7/packages/A7 Unit 3 - Exponents and Scientific Notation/Slides/A7 3.09  Slides.pptx
@@ -8871,23 +8871,23 @@
         </p:nvSpPr>
         <p:spPr>
           <a:xfrm>
-            <a:off x="777240" y="2194560"/>
-            <a:ext cx="10607040" cy="465151"/>
-          </a:xfrm>
-          <a:prstGeom prst="rect">
-            <a:avLst/>
-          </a:prstGeom>
-          <a:noFill/>
-        </p:spPr>
-        <p:txBody>
-          <a:bodyPr wrap="square" lIns="45720" rIns="45720" tIns="18288" bIns="18288" anchor="t">
-            <a:spAutoFit/>
-          </a:bodyPr>
-          <a:lstStyle/>
-          <a:p>
-            <a:pPr algn="ctr"/>
-            <a:r>
-              <a:rPr sz="2600" b="0" i="0">
+            <a:off x="1234440" y="1874519"/>
+            <a:ext cx="10058400" cy="429370"/>
+          </a:xfrm>
+          <a:prstGeom prst="rect">
+            <a:avLst/>
+          </a:prstGeom>
+          <a:noFill/>
+        </p:spPr>
+        <p:txBody>
+          <a:bodyPr wrap="square" lIns="45720" rIns="45720" tIns="18288" bIns="18288" anchor="t">
+            <a:spAutoFit/>
+          </a:bodyPr>
+          <a:lstStyle/>
+          <a:p>
+            <a:pPr algn="l"/>
+            <a:r>
+              <a:rPr sz="2400" b="0" i="0">
                 <a:solidFill>
                   <a:srgbClr val="1A1A1A"/>
                 </a:solidFill>
@@ -8906,23 +8906,23 @@
         </p:nvSpPr>
         <p:spPr>
           <a:xfrm>
-            <a:off x="777240" y="2769439"/>
-            <a:ext cx="10607040" cy="465151"/>
-          </a:xfrm>
-          <a:prstGeom prst="rect">
-            <a:avLst/>
-          </a:prstGeom>
-          <a:noFill/>
-        </p:spPr>
-        <p:txBody>
-          <a:bodyPr wrap="square" lIns="45720" rIns="45720" tIns="18288" bIns="18288" anchor="t">
-            <a:spAutoFit/>
-          </a:bodyPr>
-          <a:lstStyle/>
-          <a:p>
-            <a:pPr algn="ctr"/>
-            <a:r>
-              <a:rPr sz="2600" b="0" i="0">
+            <a:off x="1234440" y="2413618"/>
+            <a:ext cx="10058400" cy="429370"/>
+          </a:xfrm>
+          <a:prstGeom prst="rect">
+            <a:avLst/>
+          </a:prstGeom>
+          <a:noFill/>
+        </p:spPr>
+        <p:txBody>
+          <a:bodyPr wrap="square" lIns="45720" rIns="45720" tIns="18288" bIns="18288" anchor="t">
+            <a:spAutoFit/>
+          </a:bodyPr>
+          <a:lstStyle/>
+          <a:p>
+            <a:pPr algn="l"/>
+            <a:r>
+              <a:rPr sz="2400" b="0" i="0">
                 <a:solidFill>
                   <a:srgbClr val="1A1A1A"/>
                 </a:solidFill>
@@ -8941,23 +8941,23 @@
         </p:nvSpPr>
         <p:spPr>
           <a:xfrm>
-            <a:off x="777240" y="3344318"/>
-            <a:ext cx="10607040" cy="465151"/>
-          </a:xfrm>
-          <a:prstGeom prst="rect">
-            <a:avLst/>
-          </a:prstGeom>
-          <a:noFill/>
-        </p:spPr>
-        <p:txBody>
-          <a:bodyPr wrap="square" lIns="45720" rIns="45720" tIns="18288" bIns="18288" anchor="t">
-            <a:spAutoFit/>
-          </a:bodyPr>
-          <a:lstStyle/>
-          <a:p>
-            <a:pPr algn="ctr"/>
-            <a:r>
-              <a:rPr sz="2600" b="0" i="0">
+            <a:off x="1234440" y="2952716"/>
+            <a:ext cx="10058400" cy="429370"/>
+          </a:xfrm>
+          <a:prstGeom prst="rect">
+            <a:avLst/>
+          </a:prstGeom>
+          <a:noFill/>
+        </p:spPr>
+        <p:txBody>
+          <a:bodyPr wrap="square" lIns="45720" rIns="45720" tIns="18288" bIns="18288" anchor="t">
+            <a:spAutoFit/>
+          </a:bodyPr>
+          <a:lstStyle/>
+          <a:p>
+            <a:pPr algn="l"/>
+            <a:r>
+              <a:rPr sz="2400" b="1" i="0">
                 <a:solidFill>
                   <a:srgbClr val="1A1A1A"/>
                 </a:solidFill>
@@ -8999,41 +8999,6 @@
                 <a:latin typeface="Century Schoolbook"/>
               </a:rPr>
               <a:t>Answer it.</a:t>
-            </a:r>
-          </a:p>
-        </p:txBody>
-      </p:sp>
-      <p:sp>
-        <p:nvSpPr>
-          <p:cNvPr id="13" name="TextBox 12"/>
-          <p:cNvSpPr txBox="1"/>
-          <p:nvPr/>
-        </p:nvSpPr>
-        <p:spPr>
-          <a:xfrm>
-            <a:off x="777240" y="4828032"/>
-            <a:ext cx="10607040" cy="365760"/>
-          </a:xfrm>
-          <a:prstGeom prst="rect">
-            <a:avLst/>
-          </a:prstGeom>
-          <a:noFill/>
-        </p:spPr>
-        <p:txBody>
-          <a:bodyPr wrap="square" lIns="45720" rIns="45720" tIns="18288" bIns="18288" anchor="t">
-            <a:spAutoFit/>
-          </a:bodyPr>
-          <a:lstStyle/>
-          <a:p>
-            <a:pPr algn="ctr"/>
-            <a:r>
-              <a:rPr sz="1900" b="0" i="1">
-                <a:solidFill>
-                  <a:srgbClr val="6B6B6B"/>
-                </a:solidFill>
-                <a:latin typeface="Century Schoolbook"/>
-              </a:rPr>
-              <a:t>Every nonzero digit stays in the coefficient.</a:t>
             </a:r>
           </a:p>
         </p:txBody>
@@ -9309,23 +9274,23 @@
         </p:nvSpPr>
         <p:spPr>
           <a:xfrm>
-            <a:off x="777240" y="2103120"/>
-            <a:ext cx="10607040" cy="465151"/>
-          </a:xfrm>
-          <a:prstGeom prst="rect">
-            <a:avLst/>
-          </a:prstGeom>
-          <a:noFill/>
-        </p:spPr>
-        <p:txBody>
-          <a:bodyPr wrap="square" lIns="45720" rIns="45720" tIns="18288" bIns="18288" anchor="t">
-            <a:spAutoFit/>
-          </a:bodyPr>
-          <a:lstStyle/>
-          <a:p>
-            <a:pPr algn="ctr"/>
-            <a:r>
-              <a:rPr sz="2600" b="0" i="0">
+            <a:off x="1234440" y="1874519"/>
+            <a:ext cx="10058400" cy="429370"/>
+          </a:xfrm>
+          <a:prstGeom prst="rect">
+            <a:avLst/>
+          </a:prstGeom>
+          <a:noFill/>
+        </p:spPr>
+        <p:txBody>
+          <a:bodyPr wrap="square" lIns="45720" rIns="45720" tIns="18288" bIns="18288" anchor="t">
+            <a:spAutoFit/>
+          </a:bodyPr>
+          <a:lstStyle/>
+          <a:p>
+            <a:pPr algn="l"/>
+            <a:r>
+              <a:rPr sz="2400" b="0" i="0">
                 <a:solidFill>
                   <a:srgbClr val="1A1A1A"/>
                 </a:solidFill>
@@ -9344,23 +9309,23 @@
         </p:nvSpPr>
         <p:spPr>
           <a:xfrm>
-            <a:off x="777240" y="2677999"/>
-            <a:ext cx="10607040" cy="465151"/>
-          </a:xfrm>
-          <a:prstGeom prst="rect">
-            <a:avLst/>
-          </a:prstGeom>
-          <a:noFill/>
-        </p:spPr>
-        <p:txBody>
-          <a:bodyPr wrap="square" lIns="45720" rIns="45720" tIns="18288" bIns="18288" anchor="t">
-            <a:spAutoFit/>
-          </a:bodyPr>
-          <a:lstStyle/>
-          <a:p>
-            <a:pPr algn="ctr"/>
-            <a:r>
-              <a:rPr sz="2600" b="0" i="0">
+            <a:off x="1234440" y="2413618"/>
+            <a:ext cx="10058400" cy="429370"/>
+          </a:xfrm>
+          <a:prstGeom prst="rect">
+            <a:avLst/>
+          </a:prstGeom>
+          <a:noFill/>
+        </p:spPr>
+        <p:txBody>
+          <a:bodyPr wrap="square" lIns="45720" rIns="45720" tIns="18288" bIns="18288" anchor="t">
+            <a:spAutoFit/>
+          </a:bodyPr>
+          <a:lstStyle/>
+          <a:p>
+            <a:pPr algn="l"/>
+            <a:r>
+              <a:rPr sz="2400" b="0" i="0">
                 <a:solidFill>
                   <a:srgbClr val="1A1A1A"/>
                 </a:solidFill>
@@ -9379,23 +9344,23 @@
         </p:nvSpPr>
         <p:spPr>
           <a:xfrm>
-            <a:off x="777240" y="3252878"/>
-            <a:ext cx="10607040" cy="465151"/>
-          </a:xfrm>
-          <a:prstGeom prst="rect">
-            <a:avLst/>
-          </a:prstGeom>
-          <a:noFill/>
-        </p:spPr>
-        <p:txBody>
-          <a:bodyPr wrap="square" lIns="45720" rIns="45720" tIns="18288" bIns="18288" anchor="t">
-            <a:spAutoFit/>
-          </a:bodyPr>
-          <a:lstStyle/>
-          <a:p>
-            <a:pPr algn="ctr"/>
-            <a:r>
-              <a:rPr sz="2600" b="0" i="0">
+            <a:off x="1234440" y="2952716"/>
+            <a:ext cx="10058400" cy="429370"/>
+          </a:xfrm>
+          <a:prstGeom prst="rect">
+            <a:avLst/>
+          </a:prstGeom>
+          <a:noFill/>
+        </p:spPr>
+        <p:txBody>
+          <a:bodyPr wrap="square" lIns="45720" rIns="45720" tIns="18288" bIns="18288" anchor="t">
+            <a:spAutoFit/>
+          </a:bodyPr>
+          <a:lstStyle/>
+          <a:p>
+            <a:pPr algn="l"/>
+            <a:r>
+              <a:rPr sz="2400" b="1" i="0">
                 <a:solidFill>
                   <a:srgbClr val="1A1A1A"/>
                 </a:solidFill>
@@ -9414,7 +9379,7 @@
         </p:nvSpPr>
         <p:spPr>
           <a:xfrm>
-            <a:off x="1828800" y="3873477"/>
+            <a:off x="1828800" y="3583255"/>
             <a:ext cx="8503920" cy="548640"/>
           </a:xfrm>
           <a:prstGeom prst="rect">
